--- a/decks/Micro_03_Antimicrobial-Susceptibility-Testing.pptx
+++ b/decks/Micro_03_Antimicrobial-Susceptibility-Testing.pptx
@@ -25,9 +25,13 @@
     <p:sldId id="273" r:id="rId19"/>
     <p:sldId id="274" r:id="rId20"/>
     <p:sldId id="275" r:id="rId21"/>
+    <p:sldId id="284" r:id="rId35"/>
     <p:sldId id="276" r:id="rId22"/>
+    <p:sldId id="283" r:id="rId34"/>
     <p:sldId id="277" r:id="rId23"/>
+    <p:sldId id="282" r:id="rId33"/>
     <p:sldId id="278" r:id="rId24"/>
+    <p:sldId id="281" r:id="rId32"/>
     <p:sldId id="279" r:id="rId25"/>
     <p:sldId id="280" r:id="rId26"/>
   </p:sldIdLst>
@@ -3032,6 +3036,10 @@
           </a:solidFill>
           <a:ln/>
         </p:spPr>
+        <p:txBody>
+          <a:bodyPr/>
+          <a:p/>
+        </p:txBody>
       </p:sp>
       <p:sp>
         <p:nvSpPr>
@@ -3054,6 +3062,10 @@
           </a:solidFill>
           <a:ln/>
         </p:spPr>
+        <p:txBody>
+          <a:bodyPr/>
+          <a:p/>
+        </p:txBody>
       </p:sp>
       <p:sp>
         <p:nvSpPr>
@@ -3076,6 +3088,10 @@
           </a:solidFill>
           <a:ln/>
         </p:spPr>
+        <p:txBody>
+          <a:bodyPr/>
+          <a:p/>
+        </p:txBody>
       </p:sp>
       <p:sp>
         <p:nvSpPr>
@@ -3098,6 +3114,10 @@
           </a:solidFill>
           <a:ln/>
         </p:spPr>
+        <p:txBody>
+          <a:bodyPr/>
+          <a:p/>
+        </p:txBody>
       </p:sp>
       <p:sp>
         <p:nvSpPr>
@@ -3519,6 +3539,10 @@
             </a:outerShdw>
           </a:effectLst>
         </p:spPr>
+        <p:txBody>
+          <a:bodyPr/>
+          <a:p/>
+        </p:txBody>
       </p:sp>
       <p:pic>
         <p:nvPicPr>
@@ -5264,6 +5288,10 @@
           </a:solidFill>
           <a:ln/>
         </p:spPr>
+        <p:txBody>
+          <a:bodyPr/>
+          <a:p/>
+        </p:txBody>
       </p:sp>
       <p:sp>
         <p:nvSpPr>
@@ -5286,6 +5314,10 @@
           </a:solidFill>
           <a:ln/>
         </p:spPr>
+        <p:txBody>
+          <a:bodyPr/>
+          <a:p/>
+        </p:txBody>
       </p:sp>
       <p:sp>
         <p:nvSpPr>
@@ -5542,6 +5574,10 @@
             </a:outerShdw>
           </a:effectLst>
         </p:spPr>
+        <p:txBody>
+          <a:bodyPr/>
+          <a:p/>
+        </p:txBody>
       </p:sp>
       <p:sp>
         <p:nvSpPr>
@@ -5716,6 +5752,10 @@
             </a:outerShdw>
           </a:effectLst>
         </p:spPr>
+        <p:txBody>
+          <a:bodyPr/>
+          <a:p/>
+        </p:txBody>
       </p:sp>
       <p:sp>
         <p:nvSpPr>
@@ -6106,6 +6146,10 @@
             </a:outerShdw>
           </a:effectLst>
         </p:spPr>
+        <p:txBody>
+          <a:bodyPr/>
+          <a:p/>
+        </p:txBody>
       </p:sp>
       <p:sp>
         <p:nvSpPr>
@@ -6216,6 +6260,10 @@
             </a:outerShdw>
           </a:effectLst>
         </p:spPr>
+        <p:txBody>
+          <a:bodyPr/>
+          <a:p/>
+        </p:txBody>
       </p:sp>
       <p:sp>
         <p:nvSpPr>
@@ -6645,6 +6693,10 @@
             </a:outerShdw>
           </a:effectLst>
         </p:spPr>
+        <p:txBody>
+          <a:bodyPr/>
+          <a:p/>
+        </p:txBody>
       </p:sp>
       <p:sp>
         <p:nvSpPr>
@@ -6971,6 +7023,10 @@
             </a:outerShdw>
           </a:effectLst>
         </p:spPr>
+        <p:txBody>
+          <a:bodyPr/>
+          <a:p/>
+        </p:txBody>
       </p:sp>
       <p:sp>
         <p:nvSpPr>
@@ -7081,6 +7137,10 @@
             </a:outerShdw>
           </a:effectLst>
         </p:spPr>
+        <p:txBody>
+          <a:bodyPr/>
+          <a:p/>
+        </p:txBody>
       </p:sp>
       <p:sp>
         <p:nvSpPr>
@@ -7510,6 +7570,10 @@
             </a:outerShdw>
           </a:effectLst>
         </p:spPr>
+        <p:txBody>
+          <a:bodyPr/>
+          <a:p/>
+        </p:txBody>
       </p:sp>
       <p:sp>
         <p:nvSpPr>
@@ -7836,6 +7900,10 @@
             </a:outerShdw>
           </a:effectLst>
         </p:spPr>
+        <p:txBody>
+          <a:bodyPr/>
+          <a:p/>
+        </p:txBody>
       </p:sp>
       <p:sp>
         <p:nvSpPr>
@@ -7946,6 +8014,10 @@
             </a:outerShdw>
           </a:effectLst>
         </p:spPr>
+        <p:txBody>
+          <a:bodyPr/>
+          <a:p/>
+        </p:txBody>
       </p:sp>
       <p:sp>
         <p:nvSpPr>
@@ -8375,6 +8447,10 @@
             </a:outerShdw>
           </a:effectLst>
         </p:spPr>
+        <p:txBody>
+          <a:bodyPr/>
+          <a:p/>
+        </p:txBody>
       </p:sp>
       <p:sp>
         <p:nvSpPr>
@@ -8701,6 +8777,10 @@
             </a:outerShdw>
           </a:effectLst>
         </p:spPr>
+        <p:txBody>
+          <a:bodyPr/>
+          <a:p/>
+        </p:txBody>
       </p:sp>
       <p:sp>
         <p:nvSpPr>
@@ -8808,6 +8888,10 @@
             </a:outerShdw>
           </a:effectLst>
         </p:spPr>
+        <p:txBody>
+          <a:bodyPr/>
+          <a:p/>
+        </p:txBody>
       </p:sp>
       <p:sp>
         <p:nvSpPr>
@@ -8915,6 +8999,10 @@
             </a:outerShdw>
           </a:effectLst>
         </p:spPr>
+        <p:txBody>
+          <a:bodyPr/>
+          <a:p/>
+        </p:txBody>
       </p:sp>
       <p:sp>
         <p:nvSpPr>
@@ -9022,6 +9110,10 @@
             </a:outerShdw>
           </a:effectLst>
         </p:spPr>
+        <p:txBody>
+          <a:bodyPr/>
+          <a:p/>
+        </p:txBody>
       </p:sp>
       <p:sp>
         <p:nvSpPr>
@@ -9414,9 +9506,9 @@
               <a:buNone/>
             </a:pPr>
             <a:r>
-              <a:rPr lang="en-US" sz="1350" b="1" dirty="0">
-                <a:solidFill>
-                  <a:srgbClr val="1F5722"/>
+              <a:rPr lang="en-US" sz="1350" b="0" dirty="0">
+                <a:solidFill>
+                  <a:srgbClr val="33444F"/>
                 </a:solidFill>
                 <a:latin typeface="Calibri" pitchFamily="34" charset="0"/>
                 <a:ea typeface="Calibri" pitchFamily="34" charset="-122"/>
@@ -9485,130 +9577,6 @@
               <a:t>E. The breakpoint</a:t>
             </a:r>
             <a:endParaRPr lang="en-US" sz="1350" dirty="0"/>
-          </a:p>
-        </p:txBody>
-      </p:sp>
-      <p:sp>
-        <p:nvSpPr>
-          <p:cNvPr id="6" name="Shape 4"/>
-          <p:cNvSpPr/>
-          <p:nvPr/>
-        </p:nvSpPr>
-        <p:spPr>
-          <a:xfrm>
-            <a:off x="7201632" y="2395728"/>
-            <a:ext cx="4423136" cy="3246120"/>
-          </a:xfrm>
-          <a:prstGeom prst="roundRect">
-            <a:avLst>
-              <a:gd name="adj" fmla="val 2535"/>
-            </a:avLst>
-          </a:prstGeom>
-          <a:solidFill>
-            <a:srgbClr val="E8F2E9"/>
-          </a:solidFill>
-          <a:ln/>
-          <a:effectLst>
-            <a:outerShdw sx="100000" sy="100000" kx="0" ky="0" algn="bl" rotWithShape="0" blurRad="88900" dist="25400" dir="5400000">
-              <a:srgbClr val="22303C">
-                <a:alpha val="12000"/>
-              </a:srgbClr>
-            </a:outerShdw>
-          </a:effectLst>
-        </p:spPr>
-      </p:sp>
-      <p:sp>
-        <p:nvSpPr>
-          <p:cNvPr id="7" name="Text 5"/>
-          <p:cNvSpPr/>
-          <p:nvPr/>
-        </p:nvSpPr>
-        <p:spPr>
-          <a:xfrm>
-            <a:off x="7439376" y="2578608"/>
-            <a:ext cx="3965936" cy="457200"/>
-          </a:xfrm>
-          <a:prstGeom prst="rect">
-            <a:avLst/>
-          </a:prstGeom>
-          <a:noFill/>
-          <a:ln/>
-        </p:spPr>
-        <p:txBody>
-          <a:bodyPr wrap="square" lIns="0" tIns="0" rIns="0" bIns="0" rtlCol="0" anchor="ctr"/>
-          <a:lstStyle/>
-          <a:p>
-            <a:pPr indent="0" marL="0">
-              <a:buNone/>
-            </a:pPr>
-            <a:r>
-              <a:rPr lang="en-US" sz="1500" b="1" dirty="0">
-                <a:solidFill>
-                  <a:srgbClr val="2E7D32"/>
-                </a:solidFill>
-                <a:latin typeface="Calibri" pitchFamily="34" charset="0"/>
-                <a:ea typeface="Calibri" pitchFamily="34" charset="-122"/>
-                <a:cs typeface="Calibri" pitchFamily="34" charset="-120"/>
-              </a:rPr>
-              <a:t>ANSWER  </a:t>
-            </a:r>
-            <a:pPr indent="0" marL="0">
-              <a:buNone/>
-            </a:pPr>
-            <a:r>
-              <a:rPr lang="en-US" sz="1500" b="1" dirty="0">
-                <a:solidFill>
-                  <a:srgbClr val="1B2A38"/>
-                </a:solidFill>
-                <a:latin typeface="Calibri" pitchFamily="34" charset="0"/>
-                <a:ea typeface="Calibri" pitchFamily="34" charset="-122"/>
-                <a:cs typeface="Calibri" pitchFamily="34" charset="-120"/>
-              </a:rPr>
-              <a:t>B — Lowest concentration inhibiting visible growth</a:t>
-            </a:r>
-            <a:endParaRPr lang="en-US" sz="1500" dirty="0"/>
-          </a:p>
-        </p:txBody>
-      </p:sp>
-      <p:sp>
-        <p:nvSpPr>
-          <p:cNvPr id="8" name="Text 6"/>
-          <p:cNvSpPr/>
-          <p:nvPr/>
-        </p:nvSpPr>
-        <p:spPr>
-          <a:xfrm>
-            <a:off x="7439376" y="3127248"/>
-            <a:ext cx="3947648" cy="2377440"/>
-          </a:xfrm>
-          <a:prstGeom prst="rect">
-            <a:avLst/>
-          </a:prstGeom>
-          <a:noFill/>
-          <a:ln/>
-        </p:spPr>
-        <p:txBody>
-          <a:bodyPr wrap="square" lIns="0" tIns="0" rIns="0" bIns="0" rtlCol="0" anchor="t"/>
-          <a:lstStyle/>
-          <a:p>
-            <a:pPr algn="l" indent="0" marL="0">
-              <a:lnSpc>
-                <a:spcPct val="108000"/>
-              </a:lnSpc>
-              <a:buNone/>
-            </a:pPr>
-            <a:r>
-              <a:rPr lang="en-US" sz="1250" dirty="0">
-                <a:solidFill>
-                  <a:srgbClr val="33444F"/>
-                </a:solidFill>
-                <a:latin typeface="Calibri" pitchFamily="34" charset="0"/>
-                <a:ea typeface="Calibri" pitchFamily="34" charset="-122"/>
-                <a:cs typeface="Calibri" pitchFamily="34" charset="-120"/>
-              </a:rPr>
-              <a:t>The MIC is the minimum inhibitory concentration; breakpoints translate it into S/I/R.</a:t>
-            </a:r>
-            <a:endParaRPr lang="en-US" sz="1250" dirty="0"/>
           </a:p>
         </p:txBody>
       </p:sp>
@@ -9938,9 +9906,9 @@
               <a:buNone/>
             </a:pPr>
             <a:r>
-              <a:rPr lang="en-US" sz="1350" b="1" dirty="0">
-                <a:solidFill>
-                  <a:srgbClr val="1F5722"/>
+              <a:rPr lang="en-US" sz="1350" b="0" dirty="0">
+                <a:solidFill>
+                  <a:srgbClr val="33444F"/>
                 </a:solidFill>
                 <a:latin typeface="Calibri" pitchFamily="34" charset="0"/>
                 <a:ea typeface="Calibri" pitchFamily="34" charset="-122"/>
@@ -9989,130 +9957,6 @@
               <a:t>E. Susceptible-dose-dependent</a:t>
             </a:r>
             <a:endParaRPr lang="en-US" sz="1350" dirty="0"/>
-          </a:p>
-        </p:txBody>
-      </p:sp>
-      <p:sp>
-        <p:nvSpPr>
-          <p:cNvPr id="6" name="Shape 4"/>
-          <p:cNvSpPr/>
-          <p:nvPr/>
-        </p:nvSpPr>
-        <p:spPr>
-          <a:xfrm>
-            <a:off x="7201632" y="2395728"/>
-            <a:ext cx="4423136" cy="3246120"/>
-          </a:xfrm>
-          <a:prstGeom prst="roundRect">
-            <a:avLst>
-              <a:gd name="adj" fmla="val 2535"/>
-            </a:avLst>
-          </a:prstGeom>
-          <a:solidFill>
-            <a:srgbClr val="E8F2E9"/>
-          </a:solidFill>
-          <a:ln/>
-          <a:effectLst>
-            <a:outerShdw sx="100000" sy="100000" kx="0" ky="0" algn="bl" rotWithShape="0" blurRad="88900" dist="25400" dir="5400000">
-              <a:srgbClr val="22303C">
-                <a:alpha val="12000"/>
-              </a:srgbClr>
-            </a:outerShdw>
-          </a:effectLst>
-        </p:spPr>
-      </p:sp>
-      <p:sp>
-        <p:nvSpPr>
-          <p:cNvPr id="7" name="Text 5"/>
-          <p:cNvSpPr/>
-          <p:nvPr/>
-        </p:nvSpPr>
-        <p:spPr>
-          <a:xfrm>
-            <a:off x="7439376" y="2578608"/>
-            <a:ext cx="3965936" cy="457200"/>
-          </a:xfrm>
-          <a:prstGeom prst="rect">
-            <a:avLst/>
-          </a:prstGeom>
-          <a:noFill/>
-          <a:ln/>
-        </p:spPr>
-        <p:txBody>
-          <a:bodyPr wrap="square" lIns="0" tIns="0" rIns="0" bIns="0" rtlCol="0" anchor="ctr"/>
-          <a:lstStyle/>
-          <a:p>
-            <a:pPr indent="0" marL="0">
-              <a:buNone/>
-            </a:pPr>
-            <a:r>
-              <a:rPr lang="en-US" sz="1500" b="1" dirty="0">
-                <a:solidFill>
-                  <a:srgbClr val="2E7D32"/>
-                </a:solidFill>
-                <a:latin typeface="Calibri" pitchFamily="34" charset="0"/>
-                <a:ea typeface="Calibri" pitchFamily="34" charset="-122"/>
-                <a:cs typeface="Calibri" pitchFamily="34" charset="-120"/>
-              </a:rPr>
-              <a:t>ANSWER  </a:t>
-            </a:r>
-            <a:pPr indent="0" marL="0">
-              <a:buNone/>
-            </a:pPr>
-            <a:r>
-              <a:rPr lang="en-US" sz="1500" b="1" dirty="0">
-                <a:solidFill>
-                  <a:srgbClr val="1B2A38"/>
-                </a:solidFill>
-                <a:latin typeface="Calibri" pitchFamily="34" charset="0"/>
-                <a:ea typeface="Calibri" pitchFamily="34" charset="-122"/>
-                <a:cs typeface="Calibri" pitchFamily="34" charset="-120"/>
-              </a:rPr>
-              <a:t>C — Resistant</a:t>
-            </a:r>
-            <a:endParaRPr lang="en-US" sz="1500" dirty="0"/>
-          </a:p>
-        </p:txBody>
-      </p:sp>
-      <p:sp>
-        <p:nvSpPr>
-          <p:cNvPr id="8" name="Text 6"/>
-          <p:cNvSpPr/>
-          <p:nvPr/>
-        </p:nvSpPr>
-        <p:spPr>
-          <a:xfrm>
-            <a:off x="7439376" y="3127248"/>
-            <a:ext cx="3947648" cy="2377440"/>
-          </a:xfrm>
-          <a:prstGeom prst="rect">
-            <a:avLst/>
-          </a:prstGeom>
-          <a:noFill/>
-          <a:ln/>
-        </p:spPr>
-        <p:txBody>
-          <a:bodyPr wrap="square" lIns="0" tIns="0" rIns="0" bIns="0" rtlCol="0" anchor="t"/>
-          <a:lstStyle/>
-          <a:p>
-            <a:pPr algn="l" indent="0" marL="0">
-              <a:lnSpc>
-                <a:spcPct val="108000"/>
-              </a:lnSpc>
-              <a:buNone/>
-            </a:pPr>
-            <a:r>
-              <a:rPr lang="en-US" sz="1250" dirty="0">
-                <a:solidFill>
-                  <a:srgbClr val="33444F"/>
-                </a:solidFill>
-                <a:latin typeface="Calibri" pitchFamily="34" charset="0"/>
-                <a:ea typeface="Calibri" pitchFamily="34" charset="-122"/>
-                <a:cs typeface="Calibri" pitchFamily="34" charset="-120"/>
-              </a:rPr>
-              <a:t>A positive D-test reveals inducible MLSb resistance; clindamycin is reported resistant despite apparent in-vitro susceptibility.</a:t>
-            </a:r>
-            <a:endParaRPr lang="en-US" sz="1250" dirty="0"/>
           </a:p>
         </p:txBody>
       </p:sp>
@@ -10442,9 +10286,9 @@
               <a:buNone/>
             </a:pPr>
             <a:r>
-              <a:rPr lang="en-US" sz="1350" b="1" dirty="0">
-                <a:solidFill>
-                  <a:srgbClr val="1F5722"/>
+              <a:rPr lang="en-US" sz="1350" b="0" dirty="0">
+                <a:solidFill>
+                  <a:srgbClr val="33444F"/>
                 </a:solidFill>
                 <a:latin typeface="Calibri" pitchFamily="34" charset="0"/>
                 <a:ea typeface="Calibri" pitchFamily="34" charset="-122"/>
@@ -10493,130 +10337,6 @@
               <a:t>E. Inducible clindamycin resistance</a:t>
             </a:r>
             <a:endParaRPr lang="en-US" sz="1350" dirty="0"/>
-          </a:p>
-        </p:txBody>
-      </p:sp>
-      <p:sp>
-        <p:nvSpPr>
-          <p:cNvPr id="6" name="Shape 4"/>
-          <p:cNvSpPr/>
-          <p:nvPr/>
-        </p:nvSpPr>
-        <p:spPr>
-          <a:xfrm>
-            <a:off x="7201632" y="2395728"/>
-            <a:ext cx="4423136" cy="3246120"/>
-          </a:xfrm>
-          <a:prstGeom prst="roundRect">
-            <a:avLst>
-              <a:gd name="adj" fmla="val 2535"/>
-            </a:avLst>
-          </a:prstGeom>
-          <a:solidFill>
-            <a:srgbClr val="E8F2E9"/>
-          </a:solidFill>
-          <a:ln/>
-          <a:effectLst>
-            <a:outerShdw sx="100000" sy="100000" kx="0" ky="0" algn="bl" rotWithShape="0" blurRad="88900" dist="25400" dir="5400000">
-              <a:srgbClr val="22303C">
-                <a:alpha val="12000"/>
-              </a:srgbClr>
-            </a:outerShdw>
-          </a:effectLst>
-        </p:spPr>
-      </p:sp>
-      <p:sp>
-        <p:nvSpPr>
-          <p:cNvPr id="7" name="Text 5"/>
-          <p:cNvSpPr/>
-          <p:nvPr/>
-        </p:nvSpPr>
-        <p:spPr>
-          <a:xfrm>
-            <a:off x="7439376" y="2578608"/>
-            <a:ext cx="3965936" cy="457200"/>
-          </a:xfrm>
-          <a:prstGeom prst="rect">
-            <a:avLst/>
-          </a:prstGeom>
-          <a:noFill/>
-          <a:ln/>
-        </p:spPr>
-        <p:txBody>
-          <a:bodyPr wrap="square" lIns="0" tIns="0" rIns="0" bIns="0" rtlCol="0" anchor="ctr"/>
-          <a:lstStyle/>
-          <a:p>
-            <a:pPr indent="0" marL="0">
-              <a:buNone/>
-            </a:pPr>
-            <a:r>
-              <a:rPr lang="en-US" sz="1500" b="1" dirty="0">
-                <a:solidFill>
-                  <a:srgbClr val="2E7D32"/>
-                </a:solidFill>
-                <a:latin typeface="Calibri" pitchFamily="34" charset="0"/>
-                <a:ea typeface="Calibri" pitchFamily="34" charset="-122"/>
-                <a:cs typeface="Calibri" pitchFamily="34" charset="-120"/>
-              </a:rPr>
-              <a:t>ANSWER  </a:t>
-            </a:r>
-            <a:pPr indent="0" marL="0">
-              <a:buNone/>
-            </a:pPr>
-            <a:r>
-              <a:rPr lang="en-US" sz="1500" b="1" dirty="0">
-                <a:solidFill>
-                  <a:srgbClr val="1B2A38"/>
-                </a:solidFill>
-                <a:latin typeface="Calibri" pitchFamily="34" charset="0"/>
-                <a:ea typeface="Calibri" pitchFamily="34" charset="-122"/>
-                <a:cs typeface="Calibri" pitchFamily="34" charset="-120"/>
-              </a:rPr>
-              <a:t>C — Carbapenemase</a:t>
-            </a:r>
-            <a:endParaRPr lang="en-US" sz="1500" dirty="0"/>
-          </a:p>
-        </p:txBody>
-      </p:sp>
-      <p:sp>
-        <p:nvSpPr>
-          <p:cNvPr id="8" name="Text 6"/>
-          <p:cNvSpPr/>
-          <p:nvPr/>
-        </p:nvSpPr>
-        <p:spPr>
-          <a:xfrm>
-            <a:off x="7439376" y="3127248"/>
-            <a:ext cx="3947648" cy="2377440"/>
-          </a:xfrm>
-          <a:prstGeom prst="rect">
-            <a:avLst/>
-          </a:prstGeom>
-          <a:noFill/>
-          <a:ln/>
-        </p:spPr>
-        <p:txBody>
-          <a:bodyPr wrap="square" lIns="0" tIns="0" rIns="0" bIns="0" rtlCol="0" anchor="t"/>
-          <a:lstStyle/>
-          <a:p>
-            <a:pPr algn="l" indent="0" marL="0">
-              <a:lnSpc>
-                <a:spcPct val="108000"/>
-              </a:lnSpc>
-              <a:buNone/>
-            </a:pPr>
-            <a:r>
-              <a:rPr lang="en-US" sz="1250" dirty="0">
-                <a:solidFill>
-                  <a:srgbClr val="33444F"/>
-                </a:solidFill>
-                <a:latin typeface="Calibri" pitchFamily="34" charset="0"/>
-                <a:ea typeface="Calibri" pitchFamily="34" charset="-122"/>
-                <a:cs typeface="Calibri" pitchFamily="34" charset="-120"/>
-              </a:rPr>
-              <a:t>Carbapenemase-producing organisms (CRE) are a major infection-control concern and require notification and isolation.</a:t>
-            </a:r>
-            <a:endParaRPr lang="en-US" sz="1250" dirty="0"/>
           </a:p>
         </p:txBody>
       </p:sp>
@@ -10926,9 +10646,9 @@
               <a:buNone/>
             </a:pPr>
             <a:r>
-              <a:rPr lang="en-US" sz="1350" b="1" dirty="0">
-                <a:solidFill>
-                  <a:srgbClr val="1F5722"/>
+              <a:rPr lang="en-US" sz="1350" b="0" dirty="0">
+                <a:solidFill>
+                  <a:srgbClr val="33444F"/>
                 </a:solidFill>
                 <a:latin typeface="Calibri" pitchFamily="34" charset="0"/>
                 <a:ea typeface="Calibri" pitchFamily="34" charset="-122"/>
@@ -10997,130 +10717,6 @@
               <a:t>E. Applies only to anaerobes</a:t>
             </a:r>
             <a:endParaRPr lang="en-US" sz="1350" dirty="0"/>
-          </a:p>
-        </p:txBody>
-      </p:sp>
-      <p:sp>
-        <p:nvSpPr>
-          <p:cNvPr id="6" name="Shape 4"/>
-          <p:cNvSpPr/>
-          <p:nvPr/>
-        </p:nvSpPr>
-        <p:spPr>
-          <a:xfrm>
-            <a:off x="7201632" y="2395728"/>
-            <a:ext cx="4423136" cy="3246120"/>
-          </a:xfrm>
-          <a:prstGeom prst="roundRect">
-            <a:avLst>
-              <a:gd name="adj" fmla="val 2535"/>
-            </a:avLst>
-          </a:prstGeom>
-          <a:solidFill>
-            <a:srgbClr val="E8F2E9"/>
-          </a:solidFill>
-          <a:ln/>
-          <a:effectLst>
-            <a:outerShdw sx="100000" sy="100000" kx="0" ky="0" algn="bl" rotWithShape="0" blurRad="88900" dist="25400" dir="5400000">
-              <a:srgbClr val="22303C">
-                <a:alpha val="12000"/>
-              </a:srgbClr>
-            </a:outerShdw>
-          </a:effectLst>
-        </p:spPr>
-      </p:sp>
-      <p:sp>
-        <p:nvSpPr>
-          <p:cNvPr id="7" name="Text 5"/>
-          <p:cNvSpPr/>
-          <p:nvPr/>
-        </p:nvSpPr>
-        <p:spPr>
-          <a:xfrm>
-            <a:off x="7439376" y="2578608"/>
-            <a:ext cx="3965936" cy="457200"/>
-          </a:xfrm>
-          <a:prstGeom prst="rect">
-            <a:avLst/>
-          </a:prstGeom>
-          <a:noFill/>
-          <a:ln/>
-        </p:spPr>
-        <p:txBody>
-          <a:bodyPr wrap="square" lIns="0" tIns="0" rIns="0" bIns="0" rtlCol="0" anchor="ctr"/>
-          <a:lstStyle/>
-          <a:p>
-            <a:pPr indent="0" marL="0">
-              <a:buNone/>
-            </a:pPr>
-            <a:r>
-              <a:rPr lang="en-US" sz="1500" b="1" dirty="0">
-                <a:solidFill>
-                  <a:srgbClr val="2E7D32"/>
-                </a:solidFill>
-                <a:latin typeface="Calibri" pitchFamily="34" charset="0"/>
-                <a:ea typeface="Calibri" pitchFamily="34" charset="-122"/>
-                <a:cs typeface="Calibri" pitchFamily="34" charset="-120"/>
-              </a:rPr>
-              <a:t>ANSWER  </a:t>
-            </a:r>
-            <a:pPr indent="0" marL="0">
-              <a:buNone/>
-            </a:pPr>
-            <a:r>
-              <a:rPr lang="en-US" sz="1500" b="1" dirty="0">
-                <a:solidFill>
-                  <a:srgbClr val="1B2A38"/>
-                </a:solidFill>
-                <a:latin typeface="Calibri" pitchFamily="34" charset="0"/>
-                <a:ea typeface="Calibri" pitchFamily="34" charset="-122"/>
-                <a:cs typeface="Calibri" pitchFamily="34" charset="-120"/>
-              </a:rPr>
-              <a:t>B — Depends on adequate dosing</a:t>
-            </a:r>
-            <a:endParaRPr lang="en-US" sz="1500" dirty="0"/>
-          </a:p>
-        </p:txBody>
-      </p:sp>
-      <p:sp>
-        <p:nvSpPr>
-          <p:cNvPr id="8" name="Text 6"/>
-          <p:cNvSpPr/>
-          <p:nvPr/>
-        </p:nvSpPr>
-        <p:spPr>
-          <a:xfrm>
-            <a:off x="7439376" y="3127248"/>
-            <a:ext cx="3947648" cy="2377440"/>
-          </a:xfrm>
-          <a:prstGeom prst="rect">
-            <a:avLst/>
-          </a:prstGeom>
-          <a:noFill/>
-          <a:ln/>
-        </p:spPr>
-        <p:txBody>
-          <a:bodyPr wrap="square" lIns="0" tIns="0" rIns="0" bIns="0" rtlCol="0" anchor="t"/>
-          <a:lstStyle/>
-          <a:p>
-            <a:pPr algn="l" indent="0" marL="0">
-              <a:lnSpc>
-                <a:spcPct val="108000"/>
-              </a:lnSpc>
-              <a:buNone/>
-            </a:pPr>
-            <a:r>
-              <a:rPr lang="en-US" sz="1250" dirty="0">
-                <a:solidFill>
-                  <a:srgbClr val="33444F"/>
-                </a:solidFill>
-                <a:latin typeface="Calibri" pitchFamily="34" charset="0"/>
-                <a:ea typeface="Calibri" pitchFamily="34" charset="-122"/>
-                <a:cs typeface="Calibri" pitchFamily="34" charset="-120"/>
-              </a:rPr>
-              <a:t>SDD signals that clinical success requires a dosing regimen that achieves adequate drug exposure at that MIC.</a:t>
-            </a:r>
-            <a:endParaRPr lang="en-US" sz="1250" dirty="0"/>
           </a:p>
         </p:txBody>
       </p:sp>
@@ -11361,6 +10957,10 @@
           </a:solidFill>
           <a:ln/>
         </p:spPr>
+        <p:txBody>
+          <a:bodyPr/>
+          <a:p/>
+        </p:txBody>
       </p:sp>
       <p:sp>
         <p:nvSpPr>
@@ -11388,6 +10988,10 @@
             </a:outerShdw>
           </a:effectLst>
         </p:spPr>
+        <p:txBody>
+          <a:bodyPr/>
+          <a:p/>
+        </p:txBody>
       </p:sp>
       <p:sp>
         <p:nvSpPr>
@@ -11488,6 +11092,10 @@
           </a:solidFill>
           <a:ln/>
         </p:spPr>
+        <p:txBody>
+          <a:bodyPr/>
+          <a:p/>
+        </p:txBody>
       </p:sp>
       <p:sp>
         <p:nvSpPr>
@@ -11515,6 +11123,10 @@
             </a:outerShdw>
           </a:effectLst>
         </p:spPr>
+        <p:txBody>
+          <a:bodyPr/>
+          <a:p/>
+        </p:txBody>
       </p:sp>
       <p:sp>
         <p:nvSpPr>
@@ -11615,6 +11227,10 @@
           </a:solidFill>
           <a:ln/>
         </p:spPr>
+        <p:txBody>
+          <a:bodyPr/>
+          <a:p/>
+        </p:txBody>
       </p:sp>
       <p:sp>
         <p:nvSpPr>
@@ -11642,6 +11258,10 @@
             </a:outerShdw>
           </a:effectLst>
         </p:spPr>
+        <p:txBody>
+          <a:bodyPr/>
+          <a:p/>
+        </p:txBody>
       </p:sp>
       <p:sp>
         <p:nvSpPr>
@@ -11742,6 +11362,10 @@
           </a:solidFill>
           <a:ln/>
         </p:spPr>
+        <p:txBody>
+          <a:bodyPr/>
+          <a:p/>
+        </p:txBody>
       </p:sp>
       <p:sp>
         <p:nvSpPr>
@@ -11769,6 +11393,10 @@
             </a:outerShdw>
           </a:effectLst>
         </p:spPr>
+        <p:txBody>
+          <a:bodyPr/>
+          <a:p/>
+        </p:txBody>
       </p:sp>
       <p:sp>
         <p:nvSpPr>
@@ -11869,6 +11497,10 @@
           </a:solidFill>
           <a:ln/>
         </p:spPr>
+        <p:txBody>
+          <a:bodyPr/>
+          <a:p/>
+        </p:txBody>
       </p:sp>
       <p:sp>
         <p:nvSpPr>
@@ -11896,6 +11528,10 @@
             </a:outerShdw>
           </a:effectLst>
         </p:spPr>
+        <p:txBody>
+          <a:bodyPr/>
+          <a:p/>
+        </p:txBody>
       </p:sp>
       <p:sp>
         <p:nvSpPr>
@@ -12379,6 +12015,1982 @@
 </p:sld>
 </file>
 
+<file path=ppt/slides/slide26.xml><?xml version="1.0" encoding="utf-8"?>
+<p:sld xmlns:a="http://schemas.openxmlformats.org/drawingml/2006/main" xmlns:p="http://schemas.openxmlformats.org/presentationml/2006/main" xmlns:r="http://schemas.openxmlformats.org/officeDocument/2006/relationships">
+  <p:cSld>
+    <p:spTree>
+      <p:nvGrpSpPr>
+        <p:cNvPr id="1" name=""/>
+        <p:cNvGrpSpPr/>
+        <p:nvPr/>
+      </p:nvGrpSpPr>
+      <p:grpSpPr/>
+      <p:sp>
+        <p:nvSpPr>
+          <p:cNvPr id="2" name="Text 0"/>
+          <p:cNvSpPr/>
+          <p:nvPr/>
+        </p:nvSpPr>
+        <p:spPr>
+          <a:xfrm>
+            <a:off x="566928" y="329184"/>
+            <a:ext cx="10515600" cy="310896"/>
+          </a:xfrm>
+          <a:prstGeom prst="rect">
+            <a:avLst/>
+          </a:prstGeom>
+          <a:noFill/>
+          <a:ln/>
+        </p:spPr>
+        <p:txBody>
+          <a:bodyPr wrap="square" lIns="0" tIns="0" rIns="0" bIns="0" rtlCol="0" anchor="ctr"/>
+          <a:lstStyle/>
+          <a:p>
+            <a:pPr algn="l" indent="0" marL="0">
+              <a:buNone/>
+            </a:pPr>
+            <a:r>
+              <a:rPr lang="en-US" sz="1100" b="1" spc="150" kern="0" dirty="0">
+                <a:solidFill>
+                  <a:srgbClr val="2E7D32"/>
+                </a:solidFill>
+                <a:latin typeface="Calibri" pitchFamily="34" charset="0"/>
+                <a:ea typeface="Calibri" pitchFamily="34" charset="-122"/>
+                <a:cs typeface="Calibri" pitchFamily="34" charset="-120"/>
+              </a:rPr>
+              <a:t>MICROBIOLOGY   ·   BOARD REVIEW  ·  Q4</a:t>
+            </a:r>
+            <a:endParaRPr lang="en-US" sz="1100" dirty="0"/>
+          </a:p>
+        </p:txBody>
+      </p:sp>
+      <p:sp>
+        <p:nvSpPr>
+          <p:cNvPr id="3" name="Text 1"/>
+          <p:cNvSpPr/>
+          <p:nvPr/>
+        </p:nvSpPr>
+        <p:spPr>
+          <a:xfrm>
+            <a:off x="566928" y="713232"/>
+            <a:ext cx="11064240" cy="749808"/>
+          </a:xfrm>
+          <a:prstGeom prst="rect">
+            <a:avLst/>
+          </a:prstGeom>
+          <a:noFill/>
+          <a:ln/>
+        </p:spPr>
+        <p:txBody>
+          <a:bodyPr wrap="square" lIns="0" tIns="0" rIns="0" bIns="0" rtlCol="0" anchor="ctr"/>
+          <a:lstStyle/>
+          <a:p>
+            <a:pPr algn="l" indent="0" marL="0">
+              <a:buNone/>
+            </a:pPr>
+            <a:r>
+              <a:rPr lang="en-US" sz="2600" b="1" dirty="0">
+                <a:solidFill>
+                  <a:srgbClr val="0E3A5F"/>
+                </a:solidFill>
+                <a:latin typeface="Calibri" pitchFamily="34" charset="0"/>
+                <a:ea typeface="Calibri" pitchFamily="34" charset="-122"/>
+                <a:cs typeface="Calibri" pitchFamily="34" charset="-120"/>
+              </a:rPr>
+              <a:t>Board-Style Review</a:t>
+            </a:r>
+            <a:endParaRPr lang="en-US" sz="2600" dirty="0"/>
+          </a:p>
+        </p:txBody>
+      </p:sp>
+      <p:sp>
+        <p:nvSpPr>
+          <p:cNvPr id="4" name="Text 2"/>
+          <p:cNvSpPr/>
+          <p:nvPr/>
+        </p:nvSpPr>
+        <p:spPr>
+          <a:xfrm>
+            <a:off x="566928" y="1417320"/>
+            <a:ext cx="11057839" cy="914400"/>
+          </a:xfrm>
+          <a:prstGeom prst="rect">
+            <a:avLst/>
+          </a:prstGeom>
+          <a:noFill/>
+          <a:ln/>
+        </p:spPr>
+        <p:txBody>
+          <a:bodyPr wrap="square" lIns="0" tIns="0" rIns="0" bIns="0" rtlCol="0" anchor="t"/>
+          <a:lstStyle/>
+          <a:p>
+            <a:pPr algn="l" indent="0" marL="0">
+              <a:lnSpc>
+                <a:spcPct val="105000"/>
+              </a:lnSpc>
+              <a:buNone/>
+            </a:pPr>
+            <a:r>
+              <a:rPr lang="en-US" sz="1450" b="1" dirty="0">
+                <a:solidFill>
+                  <a:srgbClr val="1B2A38"/>
+                </a:solidFill>
+                <a:latin typeface="Calibri" pitchFamily="34" charset="0"/>
+                <a:ea typeface="Calibri" pitchFamily="34" charset="-122"/>
+                <a:cs typeface="Calibri" pitchFamily="34" charset="-120"/>
+              </a:rPr>
+              <a:t>'Susceptible-dose-dependent' (SDD) indicates that susceptibility:</a:t>
+            </a:r>
+            <a:endParaRPr lang="en-US" sz="1450" dirty="0"/>
+          </a:p>
+        </p:txBody>
+      </p:sp>
+      <p:sp>
+        <p:nvSpPr>
+          <p:cNvPr id="5" name="Text 3"/>
+          <p:cNvSpPr/>
+          <p:nvPr/>
+        </p:nvSpPr>
+        <p:spPr>
+          <a:xfrm>
+            <a:off x="658368" y="2395728"/>
+            <a:ext cx="6192390" cy="3017520"/>
+          </a:xfrm>
+          <a:prstGeom prst="rect">
+            <a:avLst/>
+          </a:prstGeom>
+          <a:noFill/>
+          <a:ln/>
+        </p:spPr>
+        <p:txBody>
+          <a:bodyPr wrap="square" lIns="0" tIns="0" rIns="0" bIns="0" rtlCol="0" anchor="t"/>
+          <a:lstStyle/>
+          <a:p>
+            <a:pPr algn="l" indent="0" marL="0">
+              <a:spcAft>
+                <a:spcPts val="600"/>
+              </a:spcAft>
+              <a:buNone/>
+            </a:pPr>
+            <a:r>
+              <a:rPr lang="en-US" sz="1350" dirty="0">
+                <a:solidFill>
+                  <a:srgbClr val="33444F"/>
+                </a:solidFill>
+                <a:latin typeface="Calibri" pitchFamily="34" charset="0"/>
+                <a:ea typeface="Calibri" pitchFamily="34" charset="-122"/>
+                <a:cs typeface="Calibri" pitchFamily="34" charset="-120"/>
+              </a:rPr>
+              <a:t>A. Is independent of dose</a:t>
+            </a:r>
+            <a:endParaRPr lang="en-US" sz="1350" dirty="0"/>
+          </a:p>
+          <a:p>
+            <a:pPr algn="l" indent="0" marL="0">
+              <a:spcAft>
+                <a:spcPts val="600"/>
+              </a:spcAft>
+              <a:buNone/>
+            </a:pPr>
+            <a:r>
+              <a:rPr lang="en-US" sz="1350" b="1" dirty="0">
+                <a:solidFill>
+                  <a:srgbClr val="1F5722"/>
+                </a:solidFill>
+                <a:latin typeface="Calibri" pitchFamily="34" charset="0"/>
+                <a:ea typeface="Calibri" pitchFamily="34" charset="-122"/>
+                <a:cs typeface="Calibri" pitchFamily="34" charset="-120"/>
+              </a:rPr>
+              <a:t>B. Depends on achieving an adequate dosing regimen</a:t>
+            </a:r>
+            <a:endParaRPr lang="en-US" sz="1350" dirty="0"/>
+          </a:p>
+          <a:p>
+            <a:pPr algn="l" indent="0" marL="0">
+              <a:spcAft>
+                <a:spcPts val="600"/>
+              </a:spcAft>
+              <a:buNone/>
+            </a:pPr>
+            <a:r>
+              <a:rPr lang="en-US" sz="1350" dirty="0">
+                <a:solidFill>
+                  <a:srgbClr val="33444F"/>
+                </a:solidFill>
+                <a:latin typeface="Calibri" pitchFamily="34" charset="0"/>
+                <a:ea typeface="Calibri" pitchFamily="34" charset="-122"/>
+                <a:cs typeface="Calibri" pitchFamily="34" charset="-120"/>
+              </a:rPr>
+              <a:t>C. Means the organism is resistant</a:t>
+            </a:r>
+            <a:endParaRPr lang="en-US" sz="1350" dirty="0"/>
+          </a:p>
+          <a:p>
+            <a:pPr algn="l" indent="0" marL="0">
+              <a:spcAft>
+                <a:spcPts val="600"/>
+              </a:spcAft>
+              <a:buNone/>
+            </a:pPr>
+            <a:r>
+              <a:rPr lang="en-US" sz="1350" dirty="0">
+                <a:solidFill>
+                  <a:srgbClr val="33444F"/>
+                </a:solidFill>
+                <a:latin typeface="Calibri" pitchFamily="34" charset="0"/>
+                <a:ea typeface="Calibri" pitchFamily="34" charset="-122"/>
+                <a:cs typeface="Calibri" pitchFamily="34" charset="-120"/>
+              </a:rPr>
+              <a:t>D. Requires combination therapy</a:t>
+            </a:r>
+            <a:endParaRPr lang="en-US" sz="1350" dirty="0"/>
+          </a:p>
+          <a:p>
+            <a:pPr algn="l" indent="0" marL="0">
+              <a:spcAft>
+                <a:spcPts val="600"/>
+              </a:spcAft>
+              <a:buNone/>
+            </a:pPr>
+            <a:r>
+              <a:rPr lang="en-US" sz="1350" dirty="0">
+                <a:solidFill>
+                  <a:srgbClr val="33444F"/>
+                </a:solidFill>
+                <a:latin typeface="Calibri" pitchFamily="34" charset="0"/>
+                <a:ea typeface="Calibri" pitchFamily="34" charset="-122"/>
+                <a:cs typeface="Calibri" pitchFamily="34" charset="-120"/>
+              </a:rPr>
+              <a:t>E. Applies only to anaerobes</a:t>
+            </a:r>
+            <a:endParaRPr lang="en-US" sz="1350" dirty="0"/>
+          </a:p>
+        </p:txBody>
+      </p:sp>
+      <p:sp>
+        <p:nvSpPr>
+          <p:cNvPr id="6" name="Shape 4"/>
+          <p:cNvSpPr/>
+          <p:nvPr/>
+        </p:nvSpPr>
+        <p:spPr>
+          <a:xfrm>
+            <a:off x="7201632" y="2395728"/>
+            <a:ext cx="4423136" cy="3246120"/>
+          </a:xfrm>
+          <a:prstGeom prst="roundRect">
+            <a:avLst>
+              <a:gd name="adj" fmla="val 2535"/>
+            </a:avLst>
+          </a:prstGeom>
+          <a:solidFill>
+            <a:srgbClr val="E8F2E9"/>
+          </a:solidFill>
+          <a:ln/>
+          <a:effectLst>
+            <a:outerShdw sx="100000" sy="100000" kx="0" ky="0" algn="bl" rotWithShape="0" blurRad="88900" dist="25400" dir="5400000">
+              <a:srgbClr val="22303C">
+                <a:alpha val="12000"/>
+              </a:srgbClr>
+            </a:outerShdw>
+          </a:effectLst>
+        </p:spPr>
+        <p:txBody>
+          <a:bodyPr/>
+          <a:p/>
+        </p:txBody>
+      </p:sp>
+      <p:sp>
+        <p:nvSpPr>
+          <p:cNvPr id="7" name="Text 5"/>
+          <p:cNvSpPr/>
+          <p:nvPr/>
+        </p:nvSpPr>
+        <p:spPr>
+          <a:xfrm>
+            <a:off x="7439376" y="2578608"/>
+            <a:ext cx="3965936" cy="457200"/>
+          </a:xfrm>
+          <a:prstGeom prst="rect">
+            <a:avLst/>
+          </a:prstGeom>
+          <a:noFill/>
+          <a:ln/>
+        </p:spPr>
+        <p:txBody>
+          <a:bodyPr wrap="square" lIns="0" tIns="0" rIns="0" bIns="0" rtlCol="0" anchor="ctr"/>
+          <a:lstStyle/>
+          <a:p>
+            <a:pPr indent="0" marL="0">
+              <a:buNone/>
+            </a:pPr>
+            <a:r>
+              <a:rPr lang="en-US" sz="1500" b="1" dirty="0">
+                <a:solidFill>
+                  <a:srgbClr val="2E7D32"/>
+                </a:solidFill>
+                <a:latin typeface="Calibri" pitchFamily="34" charset="0"/>
+                <a:ea typeface="Calibri" pitchFamily="34" charset="-122"/>
+                <a:cs typeface="Calibri" pitchFamily="34" charset="-120"/>
+              </a:rPr>
+              <a:t>ANSWER  </a:t>
+            </a:r>
+            <a:pPr indent="0" marL="0">
+              <a:buNone/>
+            </a:pPr>
+            <a:r>
+              <a:rPr lang="en-US" sz="1500" b="1" dirty="0">
+                <a:solidFill>
+                  <a:srgbClr val="1B2A38"/>
+                </a:solidFill>
+                <a:latin typeface="Calibri" pitchFamily="34" charset="0"/>
+                <a:ea typeface="Calibri" pitchFamily="34" charset="-122"/>
+                <a:cs typeface="Calibri" pitchFamily="34" charset="-120"/>
+              </a:rPr>
+              <a:t>B — Depends on adequate dosing</a:t>
+            </a:r>
+            <a:endParaRPr lang="en-US" sz="1500" dirty="0"/>
+          </a:p>
+        </p:txBody>
+      </p:sp>
+      <p:sp>
+        <p:nvSpPr>
+          <p:cNvPr id="8" name="Text 6"/>
+          <p:cNvSpPr/>
+          <p:nvPr/>
+        </p:nvSpPr>
+        <p:spPr>
+          <a:xfrm>
+            <a:off x="7439376" y="3127248"/>
+            <a:ext cx="3947648" cy="2377440"/>
+          </a:xfrm>
+          <a:prstGeom prst="rect">
+            <a:avLst/>
+          </a:prstGeom>
+          <a:noFill/>
+          <a:ln/>
+        </p:spPr>
+        <p:txBody>
+          <a:bodyPr wrap="square" lIns="0" tIns="0" rIns="0" bIns="0" rtlCol="0" anchor="t"/>
+          <a:lstStyle/>
+          <a:p>
+            <a:pPr algn="l" indent="0" marL="0">
+              <a:lnSpc>
+                <a:spcPct val="108000"/>
+              </a:lnSpc>
+              <a:buNone/>
+            </a:pPr>
+            <a:r>
+              <a:rPr lang="en-US" sz="1250" dirty="0">
+                <a:solidFill>
+                  <a:srgbClr val="33444F"/>
+                </a:solidFill>
+                <a:latin typeface="Calibri" pitchFamily="34" charset="0"/>
+                <a:ea typeface="Calibri" pitchFamily="34" charset="-122"/>
+                <a:cs typeface="Calibri" pitchFamily="34" charset="-120"/>
+              </a:rPr>
+              <a:t>SDD signals that clinical success requires a dosing regimen that achieves adequate drug exposure at that MIC.</a:t>
+            </a:r>
+            <a:endParaRPr lang="en-US" sz="1250" dirty="0"/>
+          </a:p>
+        </p:txBody>
+      </p:sp>
+      <p:sp>
+        <p:nvSpPr>
+          <p:cNvPr id="9" name="Text 7"/>
+          <p:cNvSpPr/>
+          <p:nvPr/>
+        </p:nvSpPr>
+        <p:spPr>
+          <a:xfrm>
+            <a:off x="566928" y="6473952"/>
+            <a:ext cx="7772400" cy="274320"/>
+          </a:xfrm>
+          <a:prstGeom prst="rect">
+            <a:avLst/>
+          </a:prstGeom>
+          <a:noFill/>
+          <a:ln/>
+        </p:spPr>
+        <p:txBody>
+          <a:bodyPr wrap="square" lIns="0" tIns="0" rIns="0" bIns="0" rtlCol="0" anchor="ctr"/>
+          <a:lstStyle/>
+          <a:p>
+            <a:pPr algn="l" indent="0" marL="0">
+              <a:buNone/>
+            </a:pPr>
+            <a:r>
+              <a:rPr lang="en-US" sz="850" dirty="0">
+                <a:solidFill>
+                  <a:srgbClr val="9AA8B4"/>
+                </a:solidFill>
+                <a:latin typeface="Calibri" pitchFamily="34" charset="0"/>
+                <a:ea typeface="Calibri" pitchFamily="34" charset="-122"/>
+                <a:cs typeface="Calibri" pitchFamily="34" charset="-120"/>
+              </a:rPr>
+              <a:t>Makassed General Hospital  ·  Department of Laboratory Medicine</a:t>
+            </a:r>
+            <a:endParaRPr lang="en-US" sz="850" dirty="0"/>
+          </a:p>
+        </p:txBody>
+      </p:sp>
+      <p:sp>
+        <p:nvSpPr>
+          <p:cNvPr id="10" name="Text 8"/>
+          <p:cNvSpPr/>
+          <p:nvPr/>
+        </p:nvSpPr>
+        <p:spPr>
+          <a:xfrm>
+            <a:off x="9814255" y="6473952"/>
+            <a:ext cx="1828800" cy="274320"/>
+          </a:xfrm>
+          <a:prstGeom prst="rect">
+            <a:avLst/>
+          </a:prstGeom>
+          <a:noFill/>
+          <a:ln/>
+        </p:spPr>
+        <p:txBody>
+          <a:bodyPr wrap="square" lIns="0" tIns="0" rIns="0" bIns="0" rtlCol="0" anchor="ctr"/>
+          <a:lstStyle/>
+          <a:p>
+            <a:pPr algn="r" indent="0" marL="0">
+              <a:buNone/>
+            </a:pPr>
+            <a:r>
+              <a:rPr lang="en-US" sz="850" dirty="0">
+                <a:solidFill>
+                  <a:srgbClr val="9AA8B4"/>
+                </a:solidFill>
+                <a:latin typeface="Calibri" pitchFamily="34" charset="0"/>
+                <a:ea typeface="Calibri" pitchFamily="34" charset="-122"/>
+                <a:cs typeface="Calibri" pitchFamily="34" charset="-120"/>
+              </a:rPr>
+              <a:t>CP Lecture Series</a:t>
+            </a:r>
+            <a:pPr algn="r" indent="0" marL="0">
+              <a:buNone/>
+            </a:pPr>
+            <a:r>
+              <a:rPr lang="en-US" sz="850" dirty="0">
+                <a:solidFill>
+                  <a:srgbClr val="DCE4EC"/>
+                </a:solidFill>
+                <a:latin typeface="Calibri" pitchFamily="34" charset="0"/>
+                <a:ea typeface="Calibri" pitchFamily="34" charset="-122"/>
+                <a:cs typeface="Calibri" pitchFamily="34" charset="-120"/>
+              </a:rPr>
+              <a:t>   ·   </a:t>
+            </a:r>
+            <a:pPr algn="r" indent="0" marL="0">
+              <a:buNone/>
+            </a:pPr>
+            <a:r>
+              <a:rPr lang="en-US" sz="850" b="1" dirty="0">
+                <a:solidFill>
+                  <a:srgbClr val="2E7D32"/>
+                </a:solidFill>
+                <a:latin typeface="Calibri" pitchFamily="34" charset="0"/>
+                <a:ea typeface="Calibri" pitchFamily="34" charset="-122"/>
+                <a:cs typeface="Calibri" pitchFamily="34" charset="-120"/>
+              </a:rPr>
+              <a:t>20</a:t>
+            </a:r>
+            <a:endParaRPr lang="en-US" sz="850" dirty="0"/>
+          </a:p>
+        </p:txBody>
+      </p:sp>
+    </p:spTree>
+  </p:cSld>
+  <p:clrMapOvr>
+    <a:masterClrMapping/>
+  </p:clrMapOvr>
+</p:sld>
+</file>
+
+<file path=ppt/slides/slide27.xml><?xml version="1.0" encoding="utf-8"?>
+<p:sld xmlns:a="http://schemas.openxmlformats.org/drawingml/2006/main" xmlns:p="http://schemas.openxmlformats.org/presentationml/2006/main" xmlns:r="http://schemas.openxmlformats.org/officeDocument/2006/relationships">
+  <p:cSld>
+    <p:spTree>
+      <p:nvGrpSpPr>
+        <p:cNvPr id="1" name=""/>
+        <p:cNvGrpSpPr/>
+        <p:nvPr/>
+      </p:nvGrpSpPr>
+      <p:grpSpPr/>
+      <p:sp>
+        <p:nvSpPr>
+          <p:cNvPr id="2" name="Text 0"/>
+          <p:cNvSpPr/>
+          <p:nvPr/>
+        </p:nvSpPr>
+        <p:spPr>
+          <a:xfrm>
+            <a:off x="566928" y="329184"/>
+            <a:ext cx="10515600" cy="310896"/>
+          </a:xfrm>
+          <a:prstGeom prst="rect">
+            <a:avLst/>
+          </a:prstGeom>
+          <a:noFill/>
+          <a:ln/>
+        </p:spPr>
+        <p:txBody>
+          <a:bodyPr wrap="square" lIns="0" tIns="0" rIns="0" bIns="0" rtlCol="0" anchor="ctr"/>
+          <a:lstStyle/>
+          <a:p>
+            <a:pPr algn="l" indent="0" marL="0">
+              <a:buNone/>
+            </a:pPr>
+            <a:r>
+              <a:rPr lang="en-US" sz="1100" b="1" spc="150" kern="0" dirty="0">
+                <a:solidFill>
+                  <a:srgbClr val="2E7D32"/>
+                </a:solidFill>
+                <a:latin typeface="Calibri" pitchFamily="34" charset="0"/>
+                <a:ea typeface="Calibri" pitchFamily="34" charset="-122"/>
+                <a:cs typeface="Calibri" pitchFamily="34" charset="-120"/>
+              </a:rPr>
+              <a:t>MICROBIOLOGY   ·   BOARD REVIEW  ·  Q3</a:t>
+            </a:r>
+            <a:endParaRPr lang="en-US" sz="1100" dirty="0"/>
+          </a:p>
+        </p:txBody>
+      </p:sp>
+      <p:sp>
+        <p:nvSpPr>
+          <p:cNvPr id="3" name="Text 1"/>
+          <p:cNvSpPr/>
+          <p:nvPr/>
+        </p:nvSpPr>
+        <p:spPr>
+          <a:xfrm>
+            <a:off x="566928" y="713232"/>
+            <a:ext cx="11064240" cy="749808"/>
+          </a:xfrm>
+          <a:prstGeom prst="rect">
+            <a:avLst/>
+          </a:prstGeom>
+          <a:noFill/>
+          <a:ln/>
+        </p:spPr>
+        <p:txBody>
+          <a:bodyPr wrap="square" lIns="0" tIns="0" rIns="0" bIns="0" rtlCol="0" anchor="ctr"/>
+          <a:lstStyle/>
+          <a:p>
+            <a:pPr algn="l" indent="0" marL="0">
+              <a:buNone/>
+            </a:pPr>
+            <a:r>
+              <a:rPr lang="en-US" sz="2600" b="1" dirty="0">
+                <a:solidFill>
+                  <a:srgbClr val="0E3A5F"/>
+                </a:solidFill>
+                <a:latin typeface="Calibri" pitchFamily="34" charset="0"/>
+                <a:ea typeface="Calibri" pitchFamily="34" charset="-122"/>
+                <a:cs typeface="Calibri" pitchFamily="34" charset="-120"/>
+              </a:rPr>
+              <a:t>Board-Style Review</a:t>
+            </a:r>
+            <a:endParaRPr lang="en-US" sz="2600" dirty="0"/>
+          </a:p>
+        </p:txBody>
+      </p:sp>
+      <p:sp>
+        <p:nvSpPr>
+          <p:cNvPr id="4" name="Text 2"/>
+          <p:cNvSpPr/>
+          <p:nvPr/>
+        </p:nvSpPr>
+        <p:spPr>
+          <a:xfrm>
+            <a:off x="566928" y="1417320"/>
+            <a:ext cx="11057839" cy="914400"/>
+          </a:xfrm>
+          <a:prstGeom prst="rect">
+            <a:avLst/>
+          </a:prstGeom>
+          <a:noFill/>
+          <a:ln/>
+        </p:spPr>
+        <p:txBody>
+          <a:bodyPr wrap="square" lIns="0" tIns="0" rIns="0" bIns="0" rtlCol="0" anchor="t"/>
+          <a:lstStyle/>
+          <a:p>
+            <a:pPr algn="l" indent="0" marL="0">
+              <a:lnSpc>
+                <a:spcPct val="105000"/>
+              </a:lnSpc>
+              <a:buNone/>
+            </a:pPr>
+            <a:r>
+              <a:rPr lang="en-US" sz="1450" b="1" dirty="0">
+                <a:solidFill>
+                  <a:srgbClr val="1B2A38"/>
+                </a:solidFill>
+                <a:latin typeface="Calibri" pitchFamily="34" charset="0"/>
+                <a:ea typeface="Calibri" pitchFamily="34" charset="-122"/>
+                <a:cs typeface="Calibri" pitchFamily="34" charset="-120"/>
+              </a:rPr>
+              <a:t>Which marker should trigger an infection-control alert for transmissible carbapenem resistance?</a:t>
+            </a:r>
+            <a:endParaRPr lang="en-US" sz="1450" dirty="0"/>
+          </a:p>
+        </p:txBody>
+      </p:sp>
+      <p:sp>
+        <p:nvSpPr>
+          <p:cNvPr id="5" name="Text 3"/>
+          <p:cNvSpPr/>
+          <p:nvPr/>
+        </p:nvSpPr>
+        <p:spPr>
+          <a:xfrm>
+            <a:off x="658368" y="2395728"/>
+            <a:ext cx="6192390" cy="3017520"/>
+          </a:xfrm>
+          <a:prstGeom prst="rect">
+            <a:avLst/>
+          </a:prstGeom>
+          <a:noFill/>
+          <a:ln/>
+        </p:spPr>
+        <p:txBody>
+          <a:bodyPr wrap="square" lIns="0" tIns="0" rIns="0" bIns="0" rtlCol="0" anchor="t"/>
+          <a:lstStyle/>
+          <a:p>
+            <a:pPr algn="l" indent="0" marL="0">
+              <a:spcAft>
+                <a:spcPts val="600"/>
+              </a:spcAft>
+              <a:buNone/>
+            </a:pPr>
+            <a:r>
+              <a:rPr lang="en-US" sz="1350" dirty="0">
+                <a:solidFill>
+                  <a:srgbClr val="33444F"/>
+                </a:solidFill>
+                <a:latin typeface="Calibri" pitchFamily="34" charset="0"/>
+                <a:ea typeface="Calibri" pitchFamily="34" charset="-122"/>
+                <a:cs typeface="Calibri" pitchFamily="34" charset="-120"/>
+              </a:rPr>
+              <a:t>A. MRSA</a:t>
+            </a:r>
+            <a:endParaRPr lang="en-US" sz="1350" dirty="0"/>
+          </a:p>
+          <a:p>
+            <a:pPr algn="l" indent="0" marL="0">
+              <a:spcAft>
+                <a:spcPts val="600"/>
+              </a:spcAft>
+              <a:buNone/>
+            </a:pPr>
+            <a:r>
+              <a:rPr lang="en-US" sz="1350" dirty="0">
+                <a:solidFill>
+                  <a:srgbClr val="33444F"/>
+                </a:solidFill>
+                <a:latin typeface="Calibri" pitchFamily="34" charset="0"/>
+                <a:ea typeface="Calibri" pitchFamily="34" charset="-122"/>
+                <a:cs typeface="Calibri" pitchFamily="34" charset="-120"/>
+              </a:rPr>
+              <a:t>B. ESBL</a:t>
+            </a:r>
+            <a:endParaRPr lang="en-US" sz="1350" dirty="0"/>
+          </a:p>
+          <a:p>
+            <a:pPr algn="l" indent="0" marL="0">
+              <a:spcAft>
+                <a:spcPts val="600"/>
+              </a:spcAft>
+              <a:buNone/>
+            </a:pPr>
+            <a:r>
+              <a:rPr lang="en-US" sz="1350" b="1" dirty="0">
+                <a:solidFill>
+                  <a:srgbClr val="1F5722"/>
+                </a:solidFill>
+                <a:latin typeface="Calibri" pitchFamily="34" charset="0"/>
+                <a:ea typeface="Calibri" pitchFamily="34" charset="-122"/>
+                <a:cs typeface="Calibri" pitchFamily="34" charset="-120"/>
+              </a:rPr>
+              <a:t>C. Carbapenemase (e.g., KPC/NDM)</a:t>
+            </a:r>
+            <a:endParaRPr lang="en-US" sz="1350" dirty="0"/>
+          </a:p>
+          <a:p>
+            <a:pPr algn="l" indent="0" marL="0">
+              <a:spcAft>
+                <a:spcPts val="600"/>
+              </a:spcAft>
+              <a:buNone/>
+            </a:pPr>
+            <a:r>
+              <a:rPr lang="en-US" sz="1350" dirty="0">
+                <a:solidFill>
+                  <a:srgbClr val="33444F"/>
+                </a:solidFill>
+                <a:latin typeface="Calibri" pitchFamily="34" charset="0"/>
+                <a:ea typeface="Calibri" pitchFamily="34" charset="-122"/>
+                <a:cs typeface="Calibri" pitchFamily="34" charset="-120"/>
+              </a:rPr>
+              <a:t>D. Penicillin-resistant pneumococcus</a:t>
+            </a:r>
+            <a:endParaRPr lang="en-US" sz="1350" dirty="0"/>
+          </a:p>
+          <a:p>
+            <a:pPr algn="l" indent="0" marL="0">
+              <a:spcAft>
+                <a:spcPts val="600"/>
+              </a:spcAft>
+              <a:buNone/>
+            </a:pPr>
+            <a:r>
+              <a:rPr lang="en-US" sz="1350" dirty="0">
+                <a:solidFill>
+                  <a:srgbClr val="33444F"/>
+                </a:solidFill>
+                <a:latin typeface="Calibri" pitchFamily="34" charset="0"/>
+                <a:ea typeface="Calibri" pitchFamily="34" charset="-122"/>
+                <a:cs typeface="Calibri" pitchFamily="34" charset="-120"/>
+              </a:rPr>
+              <a:t>E. Inducible clindamycin resistance</a:t>
+            </a:r>
+            <a:endParaRPr lang="en-US" sz="1350" dirty="0"/>
+          </a:p>
+        </p:txBody>
+      </p:sp>
+      <p:sp>
+        <p:nvSpPr>
+          <p:cNvPr id="6" name="Shape 4"/>
+          <p:cNvSpPr/>
+          <p:nvPr/>
+        </p:nvSpPr>
+        <p:spPr>
+          <a:xfrm>
+            <a:off x="7201632" y="2395728"/>
+            <a:ext cx="4423136" cy="3246120"/>
+          </a:xfrm>
+          <a:prstGeom prst="roundRect">
+            <a:avLst>
+              <a:gd name="adj" fmla="val 2535"/>
+            </a:avLst>
+          </a:prstGeom>
+          <a:solidFill>
+            <a:srgbClr val="E8F2E9"/>
+          </a:solidFill>
+          <a:ln/>
+          <a:effectLst>
+            <a:outerShdw sx="100000" sy="100000" kx="0" ky="0" algn="bl" rotWithShape="0" blurRad="88900" dist="25400" dir="5400000">
+              <a:srgbClr val="22303C">
+                <a:alpha val="12000"/>
+              </a:srgbClr>
+            </a:outerShdw>
+          </a:effectLst>
+        </p:spPr>
+        <p:txBody>
+          <a:bodyPr/>
+          <a:p/>
+        </p:txBody>
+      </p:sp>
+      <p:sp>
+        <p:nvSpPr>
+          <p:cNvPr id="7" name="Text 5"/>
+          <p:cNvSpPr/>
+          <p:nvPr/>
+        </p:nvSpPr>
+        <p:spPr>
+          <a:xfrm>
+            <a:off x="7439376" y="2578608"/>
+            <a:ext cx="3965936" cy="457200"/>
+          </a:xfrm>
+          <a:prstGeom prst="rect">
+            <a:avLst/>
+          </a:prstGeom>
+          <a:noFill/>
+          <a:ln/>
+        </p:spPr>
+        <p:txBody>
+          <a:bodyPr wrap="square" lIns="0" tIns="0" rIns="0" bIns="0" rtlCol="0" anchor="ctr"/>
+          <a:lstStyle/>
+          <a:p>
+            <a:pPr indent="0" marL="0">
+              <a:buNone/>
+            </a:pPr>
+            <a:r>
+              <a:rPr lang="en-US" sz="1500" b="1" dirty="0">
+                <a:solidFill>
+                  <a:srgbClr val="2E7D32"/>
+                </a:solidFill>
+                <a:latin typeface="Calibri" pitchFamily="34" charset="0"/>
+                <a:ea typeface="Calibri" pitchFamily="34" charset="-122"/>
+                <a:cs typeface="Calibri" pitchFamily="34" charset="-120"/>
+              </a:rPr>
+              <a:t>ANSWER  </a:t>
+            </a:r>
+            <a:pPr indent="0" marL="0">
+              <a:buNone/>
+            </a:pPr>
+            <a:r>
+              <a:rPr lang="en-US" sz="1500" b="1" dirty="0">
+                <a:solidFill>
+                  <a:srgbClr val="1B2A38"/>
+                </a:solidFill>
+                <a:latin typeface="Calibri" pitchFamily="34" charset="0"/>
+                <a:ea typeface="Calibri" pitchFamily="34" charset="-122"/>
+                <a:cs typeface="Calibri" pitchFamily="34" charset="-120"/>
+              </a:rPr>
+              <a:t>C — Carbapenemase</a:t>
+            </a:r>
+            <a:endParaRPr lang="en-US" sz="1500" dirty="0"/>
+          </a:p>
+        </p:txBody>
+      </p:sp>
+      <p:sp>
+        <p:nvSpPr>
+          <p:cNvPr id="8" name="Text 6"/>
+          <p:cNvSpPr/>
+          <p:nvPr/>
+        </p:nvSpPr>
+        <p:spPr>
+          <a:xfrm>
+            <a:off x="7439376" y="3127248"/>
+            <a:ext cx="3947648" cy="2377440"/>
+          </a:xfrm>
+          <a:prstGeom prst="rect">
+            <a:avLst/>
+          </a:prstGeom>
+          <a:noFill/>
+          <a:ln/>
+        </p:spPr>
+        <p:txBody>
+          <a:bodyPr wrap="square" lIns="0" tIns="0" rIns="0" bIns="0" rtlCol="0" anchor="t"/>
+          <a:lstStyle/>
+          <a:p>
+            <a:pPr algn="l" indent="0" marL="0">
+              <a:lnSpc>
+                <a:spcPct val="108000"/>
+              </a:lnSpc>
+              <a:buNone/>
+            </a:pPr>
+            <a:r>
+              <a:rPr lang="en-US" sz="1250" dirty="0">
+                <a:solidFill>
+                  <a:srgbClr val="33444F"/>
+                </a:solidFill>
+                <a:latin typeface="Calibri" pitchFamily="34" charset="0"/>
+                <a:ea typeface="Calibri" pitchFamily="34" charset="-122"/>
+                <a:cs typeface="Calibri" pitchFamily="34" charset="-120"/>
+              </a:rPr>
+              <a:t>Carbapenemase-producing organisms (CRE) are a major infection-control concern and require notification and isolation.</a:t>
+            </a:r>
+            <a:endParaRPr lang="en-US" sz="1250" dirty="0"/>
+          </a:p>
+        </p:txBody>
+      </p:sp>
+      <p:sp>
+        <p:nvSpPr>
+          <p:cNvPr id="9" name="Text 7"/>
+          <p:cNvSpPr/>
+          <p:nvPr/>
+        </p:nvSpPr>
+        <p:spPr>
+          <a:xfrm>
+            <a:off x="566928" y="6473952"/>
+            <a:ext cx="7772400" cy="274320"/>
+          </a:xfrm>
+          <a:prstGeom prst="rect">
+            <a:avLst/>
+          </a:prstGeom>
+          <a:noFill/>
+          <a:ln/>
+        </p:spPr>
+        <p:txBody>
+          <a:bodyPr wrap="square" lIns="0" tIns="0" rIns="0" bIns="0" rtlCol="0" anchor="ctr"/>
+          <a:lstStyle/>
+          <a:p>
+            <a:pPr algn="l" indent="0" marL="0">
+              <a:buNone/>
+            </a:pPr>
+            <a:r>
+              <a:rPr lang="en-US" sz="850" dirty="0">
+                <a:solidFill>
+                  <a:srgbClr val="9AA8B4"/>
+                </a:solidFill>
+                <a:latin typeface="Calibri" pitchFamily="34" charset="0"/>
+                <a:ea typeface="Calibri" pitchFamily="34" charset="-122"/>
+                <a:cs typeface="Calibri" pitchFamily="34" charset="-120"/>
+              </a:rPr>
+              <a:t>Makassed General Hospital  ·  Department of Laboratory Medicine</a:t>
+            </a:r>
+            <a:endParaRPr lang="en-US" sz="850" dirty="0"/>
+          </a:p>
+        </p:txBody>
+      </p:sp>
+      <p:sp>
+        <p:nvSpPr>
+          <p:cNvPr id="10" name="Text 8"/>
+          <p:cNvSpPr/>
+          <p:nvPr/>
+        </p:nvSpPr>
+        <p:spPr>
+          <a:xfrm>
+            <a:off x="9814255" y="6473952"/>
+            <a:ext cx="1828800" cy="274320"/>
+          </a:xfrm>
+          <a:prstGeom prst="rect">
+            <a:avLst/>
+          </a:prstGeom>
+          <a:noFill/>
+          <a:ln/>
+        </p:spPr>
+        <p:txBody>
+          <a:bodyPr wrap="square" lIns="0" tIns="0" rIns="0" bIns="0" rtlCol="0" anchor="ctr"/>
+          <a:lstStyle/>
+          <a:p>
+            <a:pPr algn="r" indent="0" marL="0">
+              <a:buNone/>
+            </a:pPr>
+            <a:r>
+              <a:rPr lang="en-US" sz="850" dirty="0">
+                <a:solidFill>
+                  <a:srgbClr val="9AA8B4"/>
+                </a:solidFill>
+                <a:latin typeface="Calibri" pitchFamily="34" charset="0"/>
+                <a:ea typeface="Calibri" pitchFamily="34" charset="-122"/>
+                <a:cs typeface="Calibri" pitchFamily="34" charset="-120"/>
+              </a:rPr>
+              <a:t>CP Lecture Series</a:t>
+            </a:r>
+            <a:pPr algn="r" indent="0" marL="0">
+              <a:buNone/>
+            </a:pPr>
+            <a:r>
+              <a:rPr lang="en-US" sz="850" dirty="0">
+                <a:solidFill>
+                  <a:srgbClr val="DCE4EC"/>
+                </a:solidFill>
+                <a:latin typeface="Calibri" pitchFamily="34" charset="0"/>
+                <a:ea typeface="Calibri" pitchFamily="34" charset="-122"/>
+                <a:cs typeface="Calibri" pitchFamily="34" charset="-120"/>
+              </a:rPr>
+              <a:t>   ·   </a:t>
+            </a:r>
+            <a:pPr algn="r" indent="0" marL="0">
+              <a:buNone/>
+            </a:pPr>
+            <a:r>
+              <a:rPr lang="en-US" sz="850" b="1" dirty="0">
+                <a:solidFill>
+                  <a:srgbClr val="2E7D32"/>
+                </a:solidFill>
+                <a:latin typeface="Calibri" pitchFamily="34" charset="0"/>
+                <a:ea typeface="Calibri" pitchFamily="34" charset="-122"/>
+                <a:cs typeface="Calibri" pitchFamily="34" charset="-120"/>
+              </a:rPr>
+              <a:t>19</a:t>
+            </a:r>
+            <a:endParaRPr lang="en-US" sz="850" dirty="0"/>
+          </a:p>
+        </p:txBody>
+      </p:sp>
+    </p:spTree>
+  </p:cSld>
+  <p:clrMapOvr>
+    <a:masterClrMapping/>
+  </p:clrMapOvr>
+</p:sld>
+</file>
+
+<file path=ppt/slides/slide28.xml><?xml version="1.0" encoding="utf-8"?>
+<p:sld xmlns:a="http://schemas.openxmlformats.org/drawingml/2006/main" xmlns:p="http://schemas.openxmlformats.org/presentationml/2006/main" xmlns:r="http://schemas.openxmlformats.org/officeDocument/2006/relationships">
+  <p:cSld>
+    <p:spTree>
+      <p:nvGrpSpPr>
+        <p:cNvPr id="1" name=""/>
+        <p:cNvGrpSpPr/>
+        <p:nvPr/>
+      </p:nvGrpSpPr>
+      <p:grpSpPr/>
+      <p:sp>
+        <p:nvSpPr>
+          <p:cNvPr id="2" name="Text 0"/>
+          <p:cNvSpPr/>
+          <p:nvPr/>
+        </p:nvSpPr>
+        <p:spPr>
+          <a:xfrm>
+            <a:off x="566928" y="329184"/>
+            <a:ext cx="10515600" cy="310896"/>
+          </a:xfrm>
+          <a:prstGeom prst="rect">
+            <a:avLst/>
+          </a:prstGeom>
+          <a:noFill/>
+          <a:ln/>
+        </p:spPr>
+        <p:txBody>
+          <a:bodyPr wrap="square" lIns="0" tIns="0" rIns="0" bIns="0" rtlCol="0" anchor="ctr"/>
+          <a:lstStyle/>
+          <a:p>
+            <a:pPr algn="l" indent="0" marL="0">
+              <a:buNone/>
+            </a:pPr>
+            <a:r>
+              <a:rPr lang="en-US" sz="1100" b="1" spc="150" kern="0" dirty="0">
+                <a:solidFill>
+                  <a:srgbClr val="2E7D32"/>
+                </a:solidFill>
+                <a:latin typeface="Calibri" pitchFamily="34" charset="0"/>
+                <a:ea typeface="Calibri" pitchFamily="34" charset="-122"/>
+                <a:cs typeface="Calibri" pitchFamily="34" charset="-120"/>
+              </a:rPr>
+              <a:t>MICROBIOLOGY   ·   BOARD REVIEW  ·  Q2</a:t>
+            </a:r>
+            <a:endParaRPr lang="en-US" sz="1100" dirty="0"/>
+          </a:p>
+        </p:txBody>
+      </p:sp>
+      <p:sp>
+        <p:nvSpPr>
+          <p:cNvPr id="3" name="Text 1"/>
+          <p:cNvSpPr/>
+          <p:nvPr/>
+        </p:nvSpPr>
+        <p:spPr>
+          <a:xfrm>
+            <a:off x="566928" y="713232"/>
+            <a:ext cx="11064240" cy="749808"/>
+          </a:xfrm>
+          <a:prstGeom prst="rect">
+            <a:avLst/>
+          </a:prstGeom>
+          <a:noFill/>
+          <a:ln/>
+        </p:spPr>
+        <p:txBody>
+          <a:bodyPr wrap="square" lIns="0" tIns="0" rIns="0" bIns="0" rtlCol="0" anchor="ctr"/>
+          <a:lstStyle/>
+          <a:p>
+            <a:pPr algn="l" indent="0" marL="0">
+              <a:buNone/>
+            </a:pPr>
+            <a:r>
+              <a:rPr lang="en-US" sz="2600" b="1" dirty="0">
+                <a:solidFill>
+                  <a:srgbClr val="0E3A5F"/>
+                </a:solidFill>
+                <a:latin typeface="Calibri" pitchFamily="34" charset="0"/>
+                <a:ea typeface="Calibri" pitchFamily="34" charset="-122"/>
+                <a:cs typeface="Calibri" pitchFamily="34" charset="-120"/>
+              </a:rPr>
+              <a:t>Board-Style Review</a:t>
+            </a:r>
+            <a:endParaRPr lang="en-US" sz="2600" dirty="0"/>
+          </a:p>
+        </p:txBody>
+      </p:sp>
+      <p:sp>
+        <p:nvSpPr>
+          <p:cNvPr id="4" name="Text 2"/>
+          <p:cNvSpPr/>
+          <p:nvPr/>
+        </p:nvSpPr>
+        <p:spPr>
+          <a:xfrm>
+            <a:off x="566928" y="1417320"/>
+            <a:ext cx="11057839" cy="914400"/>
+          </a:xfrm>
+          <a:prstGeom prst="rect">
+            <a:avLst/>
+          </a:prstGeom>
+          <a:noFill/>
+          <a:ln/>
+        </p:spPr>
+        <p:txBody>
+          <a:bodyPr wrap="square" lIns="0" tIns="0" rIns="0" bIns="0" rtlCol="0" anchor="t"/>
+          <a:lstStyle/>
+          <a:p>
+            <a:pPr algn="l" indent="0" marL="0">
+              <a:lnSpc>
+                <a:spcPct val="105000"/>
+              </a:lnSpc>
+              <a:buNone/>
+            </a:pPr>
+            <a:r>
+              <a:rPr lang="en-US" sz="1450" b="1" dirty="0">
+                <a:solidFill>
+                  <a:srgbClr val="1B2A38"/>
+                </a:solidFill>
+                <a:latin typeface="Calibri" pitchFamily="34" charset="0"/>
+                <a:ea typeface="Calibri" pitchFamily="34" charset="-122"/>
+                <a:cs typeface="Calibri" pitchFamily="34" charset="-120"/>
+              </a:rPr>
+              <a:t>A positive D-test in S. aureus means clindamycin should be reported as:</a:t>
+            </a:r>
+            <a:endParaRPr lang="en-US" sz="1450" dirty="0"/>
+          </a:p>
+        </p:txBody>
+      </p:sp>
+      <p:sp>
+        <p:nvSpPr>
+          <p:cNvPr id="5" name="Text 3"/>
+          <p:cNvSpPr/>
+          <p:nvPr/>
+        </p:nvSpPr>
+        <p:spPr>
+          <a:xfrm>
+            <a:off x="658368" y="2395728"/>
+            <a:ext cx="6192390" cy="3017520"/>
+          </a:xfrm>
+          <a:prstGeom prst="rect">
+            <a:avLst/>
+          </a:prstGeom>
+          <a:noFill/>
+          <a:ln/>
+        </p:spPr>
+        <p:txBody>
+          <a:bodyPr wrap="square" lIns="0" tIns="0" rIns="0" bIns="0" rtlCol="0" anchor="t"/>
+          <a:lstStyle/>
+          <a:p>
+            <a:pPr algn="l" indent="0" marL="0">
+              <a:spcAft>
+                <a:spcPts val="600"/>
+              </a:spcAft>
+              <a:buNone/>
+            </a:pPr>
+            <a:r>
+              <a:rPr lang="en-US" sz="1350" dirty="0">
+                <a:solidFill>
+                  <a:srgbClr val="33444F"/>
+                </a:solidFill>
+                <a:latin typeface="Calibri" pitchFamily="34" charset="0"/>
+                <a:ea typeface="Calibri" pitchFamily="34" charset="-122"/>
+                <a:cs typeface="Calibri" pitchFamily="34" charset="-120"/>
+              </a:rPr>
+              <a:t>A. Susceptible</a:t>
+            </a:r>
+            <a:endParaRPr lang="en-US" sz="1350" dirty="0"/>
+          </a:p>
+          <a:p>
+            <a:pPr algn="l" indent="0" marL="0">
+              <a:spcAft>
+                <a:spcPts val="600"/>
+              </a:spcAft>
+              <a:buNone/>
+            </a:pPr>
+            <a:r>
+              <a:rPr lang="en-US" sz="1350" dirty="0">
+                <a:solidFill>
+                  <a:srgbClr val="33444F"/>
+                </a:solidFill>
+                <a:latin typeface="Calibri" pitchFamily="34" charset="0"/>
+                <a:ea typeface="Calibri" pitchFamily="34" charset="-122"/>
+                <a:cs typeface="Calibri" pitchFamily="34" charset="-120"/>
+              </a:rPr>
+              <a:t>B. Intermediate</a:t>
+            </a:r>
+            <a:endParaRPr lang="en-US" sz="1350" dirty="0"/>
+          </a:p>
+          <a:p>
+            <a:pPr algn="l" indent="0" marL="0">
+              <a:spcAft>
+                <a:spcPts val="600"/>
+              </a:spcAft>
+              <a:buNone/>
+            </a:pPr>
+            <a:r>
+              <a:rPr lang="en-US" sz="1350" b="1" dirty="0">
+                <a:solidFill>
+                  <a:srgbClr val="1F5722"/>
+                </a:solidFill>
+                <a:latin typeface="Calibri" pitchFamily="34" charset="0"/>
+                <a:ea typeface="Calibri" pitchFamily="34" charset="-122"/>
+                <a:cs typeface="Calibri" pitchFamily="34" charset="-120"/>
+              </a:rPr>
+              <a:t>C. Resistant</a:t>
+            </a:r>
+            <a:endParaRPr lang="en-US" sz="1350" dirty="0"/>
+          </a:p>
+          <a:p>
+            <a:pPr algn="l" indent="0" marL="0">
+              <a:spcAft>
+                <a:spcPts val="600"/>
+              </a:spcAft>
+              <a:buNone/>
+            </a:pPr>
+            <a:r>
+              <a:rPr lang="en-US" sz="1350" dirty="0">
+                <a:solidFill>
+                  <a:srgbClr val="33444F"/>
+                </a:solidFill>
+                <a:latin typeface="Calibri" pitchFamily="34" charset="0"/>
+                <a:ea typeface="Calibri" pitchFamily="34" charset="-122"/>
+                <a:cs typeface="Calibri" pitchFamily="34" charset="-120"/>
+              </a:rPr>
+              <a:t>D. Not tested</a:t>
+            </a:r>
+            <a:endParaRPr lang="en-US" sz="1350" dirty="0"/>
+          </a:p>
+          <a:p>
+            <a:pPr algn="l" indent="0" marL="0">
+              <a:spcAft>
+                <a:spcPts val="600"/>
+              </a:spcAft>
+              <a:buNone/>
+            </a:pPr>
+            <a:r>
+              <a:rPr lang="en-US" sz="1350" dirty="0">
+                <a:solidFill>
+                  <a:srgbClr val="33444F"/>
+                </a:solidFill>
+                <a:latin typeface="Calibri" pitchFamily="34" charset="0"/>
+                <a:ea typeface="Calibri" pitchFamily="34" charset="-122"/>
+                <a:cs typeface="Calibri" pitchFamily="34" charset="-120"/>
+              </a:rPr>
+              <a:t>E. Susceptible-dose-dependent</a:t>
+            </a:r>
+            <a:endParaRPr lang="en-US" sz="1350" dirty="0"/>
+          </a:p>
+        </p:txBody>
+      </p:sp>
+      <p:sp>
+        <p:nvSpPr>
+          <p:cNvPr id="6" name="Shape 4"/>
+          <p:cNvSpPr/>
+          <p:nvPr/>
+        </p:nvSpPr>
+        <p:spPr>
+          <a:xfrm>
+            <a:off x="7201632" y="2395728"/>
+            <a:ext cx="4423136" cy="3246120"/>
+          </a:xfrm>
+          <a:prstGeom prst="roundRect">
+            <a:avLst>
+              <a:gd name="adj" fmla="val 2535"/>
+            </a:avLst>
+          </a:prstGeom>
+          <a:solidFill>
+            <a:srgbClr val="E8F2E9"/>
+          </a:solidFill>
+          <a:ln/>
+          <a:effectLst>
+            <a:outerShdw sx="100000" sy="100000" kx="0" ky="0" algn="bl" rotWithShape="0" blurRad="88900" dist="25400" dir="5400000">
+              <a:srgbClr val="22303C">
+                <a:alpha val="12000"/>
+              </a:srgbClr>
+            </a:outerShdw>
+          </a:effectLst>
+        </p:spPr>
+        <p:txBody>
+          <a:bodyPr/>
+          <a:p/>
+        </p:txBody>
+      </p:sp>
+      <p:sp>
+        <p:nvSpPr>
+          <p:cNvPr id="7" name="Text 5"/>
+          <p:cNvSpPr/>
+          <p:nvPr/>
+        </p:nvSpPr>
+        <p:spPr>
+          <a:xfrm>
+            <a:off x="7439376" y="2578608"/>
+            <a:ext cx="3965936" cy="457200"/>
+          </a:xfrm>
+          <a:prstGeom prst="rect">
+            <a:avLst/>
+          </a:prstGeom>
+          <a:noFill/>
+          <a:ln/>
+        </p:spPr>
+        <p:txBody>
+          <a:bodyPr wrap="square" lIns="0" tIns="0" rIns="0" bIns="0" rtlCol="0" anchor="ctr"/>
+          <a:lstStyle/>
+          <a:p>
+            <a:pPr indent="0" marL="0">
+              <a:buNone/>
+            </a:pPr>
+            <a:r>
+              <a:rPr lang="en-US" sz="1500" b="1" dirty="0">
+                <a:solidFill>
+                  <a:srgbClr val="2E7D32"/>
+                </a:solidFill>
+                <a:latin typeface="Calibri" pitchFamily="34" charset="0"/>
+                <a:ea typeface="Calibri" pitchFamily="34" charset="-122"/>
+                <a:cs typeface="Calibri" pitchFamily="34" charset="-120"/>
+              </a:rPr>
+              <a:t>ANSWER  </a:t>
+            </a:r>
+            <a:pPr indent="0" marL="0">
+              <a:buNone/>
+            </a:pPr>
+            <a:r>
+              <a:rPr lang="en-US" sz="1500" b="1" dirty="0">
+                <a:solidFill>
+                  <a:srgbClr val="1B2A38"/>
+                </a:solidFill>
+                <a:latin typeface="Calibri" pitchFamily="34" charset="0"/>
+                <a:ea typeface="Calibri" pitchFamily="34" charset="-122"/>
+                <a:cs typeface="Calibri" pitchFamily="34" charset="-120"/>
+              </a:rPr>
+              <a:t>C — Resistant</a:t>
+            </a:r>
+            <a:endParaRPr lang="en-US" sz="1500" dirty="0"/>
+          </a:p>
+        </p:txBody>
+      </p:sp>
+      <p:sp>
+        <p:nvSpPr>
+          <p:cNvPr id="8" name="Text 6"/>
+          <p:cNvSpPr/>
+          <p:nvPr/>
+        </p:nvSpPr>
+        <p:spPr>
+          <a:xfrm>
+            <a:off x="7439376" y="3127248"/>
+            <a:ext cx="3947648" cy="2377440"/>
+          </a:xfrm>
+          <a:prstGeom prst="rect">
+            <a:avLst/>
+          </a:prstGeom>
+          <a:noFill/>
+          <a:ln/>
+        </p:spPr>
+        <p:txBody>
+          <a:bodyPr wrap="square" lIns="0" tIns="0" rIns="0" bIns="0" rtlCol="0" anchor="t"/>
+          <a:lstStyle/>
+          <a:p>
+            <a:pPr algn="l" indent="0" marL="0">
+              <a:lnSpc>
+                <a:spcPct val="108000"/>
+              </a:lnSpc>
+              <a:buNone/>
+            </a:pPr>
+            <a:r>
+              <a:rPr lang="en-US" sz="1250" dirty="0">
+                <a:solidFill>
+                  <a:srgbClr val="33444F"/>
+                </a:solidFill>
+                <a:latin typeface="Calibri" pitchFamily="34" charset="0"/>
+                <a:ea typeface="Calibri" pitchFamily="34" charset="-122"/>
+                <a:cs typeface="Calibri" pitchFamily="34" charset="-120"/>
+              </a:rPr>
+              <a:t>A positive D-test reveals inducible MLSb resistance; clindamycin is reported resistant despite apparent in-vitro susceptibility.</a:t>
+            </a:r>
+            <a:endParaRPr lang="en-US" sz="1250" dirty="0"/>
+          </a:p>
+        </p:txBody>
+      </p:sp>
+      <p:sp>
+        <p:nvSpPr>
+          <p:cNvPr id="9" name="Text 7"/>
+          <p:cNvSpPr/>
+          <p:nvPr/>
+        </p:nvSpPr>
+        <p:spPr>
+          <a:xfrm>
+            <a:off x="566928" y="6473952"/>
+            <a:ext cx="7772400" cy="274320"/>
+          </a:xfrm>
+          <a:prstGeom prst="rect">
+            <a:avLst/>
+          </a:prstGeom>
+          <a:noFill/>
+          <a:ln/>
+        </p:spPr>
+        <p:txBody>
+          <a:bodyPr wrap="square" lIns="0" tIns="0" rIns="0" bIns="0" rtlCol="0" anchor="ctr"/>
+          <a:lstStyle/>
+          <a:p>
+            <a:pPr algn="l" indent="0" marL="0">
+              <a:buNone/>
+            </a:pPr>
+            <a:r>
+              <a:rPr lang="en-US" sz="850" dirty="0">
+                <a:solidFill>
+                  <a:srgbClr val="9AA8B4"/>
+                </a:solidFill>
+                <a:latin typeface="Calibri" pitchFamily="34" charset="0"/>
+                <a:ea typeface="Calibri" pitchFamily="34" charset="-122"/>
+                <a:cs typeface="Calibri" pitchFamily="34" charset="-120"/>
+              </a:rPr>
+              <a:t>Makassed General Hospital  ·  Department of Laboratory Medicine</a:t>
+            </a:r>
+            <a:endParaRPr lang="en-US" sz="850" dirty="0"/>
+          </a:p>
+        </p:txBody>
+      </p:sp>
+      <p:sp>
+        <p:nvSpPr>
+          <p:cNvPr id="10" name="Text 8"/>
+          <p:cNvSpPr/>
+          <p:nvPr/>
+        </p:nvSpPr>
+        <p:spPr>
+          <a:xfrm>
+            <a:off x="9814255" y="6473952"/>
+            <a:ext cx="1828800" cy="274320"/>
+          </a:xfrm>
+          <a:prstGeom prst="rect">
+            <a:avLst/>
+          </a:prstGeom>
+          <a:noFill/>
+          <a:ln/>
+        </p:spPr>
+        <p:txBody>
+          <a:bodyPr wrap="square" lIns="0" tIns="0" rIns="0" bIns="0" rtlCol="0" anchor="ctr"/>
+          <a:lstStyle/>
+          <a:p>
+            <a:pPr algn="r" indent="0" marL="0">
+              <a:buNone/>
+            </a:pPr>
+            <a:r>
+              <a:rPr lang="en-US" sz="850" dirty="0">
+                <a:solidFill>
+                  <a:srgbClr val="9AA8B4"/>
+                </a:solidFill>
+                <a:latin typeface="Calibri" pitchFamily="34" charset="0"/>
+                <a:ea typeface="Calibri" pitchFamily="34" charset="-122"/>
+                <a:cs typeface="Calibri" pitchFamily="34" charset="-120"/>
+              </a:rPr>
+              <a:t>CP Lecture Series</a:t>
+            </a:r>
+            <a:pPr algn="r" indent="0" marL="0">
+              <a:buNone/>
+            </a:pPr>
+            <a:r>
+              <a:rPr lang="en-US" sz="850" dirty="0">
+                <a:solidFill>
+                  <a:srgbClr val="DCE4EC"/>
+                </a:solidFill>
+                <a:latin typeface="Calibri" pitchFamily="34" charset="0"/>
+                <a:ea typeface="Calibri" pitchFamily="34" charset="-122"/>
+                <a:cs typeface="Calibri" pitchFamily="34" charset="-120"/>
+              </a:rPr>
+              <a:t>   ·   </a:t>
+            </a:r>
+            <a:pPr algn="r" indent="0" marL="0">
+              <a:buNone/>
+            </a:pPr>
+            <a:r>
+              <a:rPr lang="en-US" sz="850" b="1" dirty="0">
+                <a:solidFill>
+                  <a:srgbClr val="2E7D32"/>
+                </a:solidFill>
+                <a:latin typeface="Calibri" pitchFamily="34" charset="0"/>
+                <a:ea typeface="Calibri" pitchFamily="34" charset="-122"/>
+                <a:cs typeface="Calibri" pitchFamily="34" charset="-120"/>
+              </a:rPr>
+              <a:t>18</a:t>
+            </a:r>
+            <a:endParaRPr lang="en-US" sz="850" dirty="0"/>
+          </a:p>
+        </p:txBody>
+      </p:sp>
+    </p:spTree>
+  </p:cSld>
+  <p:clrMapOvr>
+    <a:masterClrMapping/>
+  </p:clrMapOvr>
+</p:sld>
+</file>
+
+<file path=ppt/slides/slide29.xml><?xml version="1.0" encoding="utf-8"?>
+<p:sld xmlns:a="http://schemas.openxmlformats.org/drawingml/2006/main" xmlns:p="http://schemas.openxmlformats.org/presentationml/2006/main" xmlns:r="http://schemas.openxmlformats.org/officeDocument/2006/relationships">
+  <p:cSld>
+    <p:spTree>
+      <p:nvGrpSpPr>
+        <p:cNvPr id="1" name=""/>
+        <p:cNvGrpSpPr/>
+        <p:nvPr/>
+      </p:nvGrpSpPr>
+      <p:grpSpPr/>
+      <p:sp>
+        <p:nvSpPr>
+          <p:cNvPr id="2" name="Text 0"/>
+          <p:cNvSpPr/>
+          <p:nvPr/>
+        </p:nvSpPr>
+        <p:spPr>
+          <a:xfrm>
+            <a:off x="566928" y="329184"/>
+            <a:ext cx="10515600" cy="310896"/>
+          </a:xfrm>
+          <a:prstGeom prst="rect">
+            <a:avLst/>
+          </a:prstGeom>
+          <a:noFill/>
+          <a:ln/>
+        </p:spPr>
+        <p:txBody>
+          <a:bodyPr wrap="square" lIns="0" tIns="0" rIns="0" bIns="0" rtlCol="0" anchor="ctr"/>
+          <a:lstStyle/>
+          <a:p>
+            <a:pPr algn="l" indent="0" marL="0">
+              <a:buNone/>
+            </a:pPr>
+            <a:r>
+              <a:rPr lang="en-US" sz="1100" b="1" spc="150" kern="0" dirty="0">
+                <a:solidFill>
+                  <a:srgbClr val="2E7D32"/>
+                </a:solidFill>
+                <a:latin typeface="Calibri" pitchFamily="34" charset="0"/>
+                <a:ea typeface="Calibri" pitchFamily="34" charset="-122"/>
+                <a:cs typeface="Calibri" pitchFamily="34" charset="-120"/>
+              </a:rPr>
+              <a:t>MICROBIOLOGY   ·   BOARD REVIEW  ·  Q1</a:t>
+            </a:r>
+            <a:endParaRPr lang="en-US" sz="1100" dirty="0"/>
+          </a:p>
+        </p:txBody>
+      </p:sp>
+      <p:sp>
+        <p:nvSpPr>
+          <p:cNvPr id="3" name="Text 1"/>
+          <p:cNvSpPr/>
+          <p:nvPr/>
+        </p:nvSpPr>
+        <p:spPr>
+          <a:xfrm>
+            <a:off x="566928" y="713232"/>
+            <a:ext cx="11064240" cy="749808"/>
+          </a:xfrm>
+          <a:prstGeom prst="rect">
+            <a:avLst/>
+          </a:prstGeom>
+          <a:noFill/>
+          <a:ln/>
+        </p:spPr>
+        <p:txBody>
+          <a:bodyPr wrap="square" lIns="0" tIns="0" rIns="0" bIns="0" rtlCol="0" anchor="ctr"/>
+          <a:lstStyle/>
+          <a:p>
+            <a:pPr algn="l" indent="0" marL="0">
+              <a:buNone/>
+            </a:pPr>
+            <a:r>
+              <a:rPr lang="en-US" sz="2600" b="1" dirty="0">
+                <a:solidFill>
+                  <a:srgbClr val="0E3A5F"/>
+                </a:solidFill>
+                <a:latin typeface="Calibri" pitchFamily="34" charset="0"/>
+                <a:ea typeface="Calibri" pitchFamily="34" charset="-122"/>
+                <a:cs typeface="Calibri" pitchFamily="34" charset="-120"/>
+              </a:rPr>
+              <a:t>Board-Style Review</a:t>
+            </a:r>
+            <a:endParaRPr lang="en-US" sz="2600" dirty="0"/>
+          </a:p>
+        </p:txBody>
+      </p:sp>
+      <p:sp>
+        <p:nvSpPr>
+          <p:cNvPr id="4" name="Text 2"/>
+          <p:cNvSpPr/>
+          <p:nvPr/>
+        </p:nvSpPr>
+        <p:spPr>
+          <a:xfrm>
+            <a:off x="566928" y="1417320"/>
+            <a:ext cx="11057839" cy="914400"/>
+          </a:xfrm>
+          <a:prstGeom prst="rect">
+            <a:avLst/>
+          </a:prstGeom>
+          <a:noFill/>
+          <a:ln/>
+        </p:spPr>
+        <p:txBody>
+          <a:bodyPr wrap="square" lIns="0" tIns="0" rIns="0" bIns="0" rtlCol="0" anchor="t"/>
+          <a:lstStyle/>
+          <a:p>
+            <a:pPr algn="l" indent="0" marL="0">
+              <a:lnSpc>
+                <a:spcPct val="105000"/>
+              </a:lnSpc>
+              <a:buNone/>
+            </a:pPr>
+            <a:r>
+              <a:rPr lang="en-US" sz="1450" b="1" dirty="0">
+                <a:solidFill>
+                  <a:srgbClr val="1B2A38"/>
+                </a:solidFill>
+                <a:latin typeface="Calibri" pitchFamily="34" charset="0"/>
+                <a:ea typeface="Calibri" pitchFamily="34" charset="-122"/>
+                <a:cs typeface="Calibri" pitchFamily="34" charset="-120"/>
+              </a:rPr>
+              <a:t>The MIC is defined as:</a:t>
+            </a:r>
+            <a:endParaRPr lang="en-US" sz="1450" dirty="0"/>
+          </a:p>
+        </p:txBody>
+      </p:sp>
+      <p:sp>
+        <p:nvSpPr>
+          <p:cNvPr id="5" name="Text 3"/>
+          <p:cNvSpPr/>
+          <p:nvPr/>
+        </p:nvSpPr>
+        <p:spPr>
+          <a:xfrm>
+            <a:off x="658368" y="2395728"/>
+            <a:ext cx="6192390" cy="3017520"/>
+          </a:xfrm>
+          <a:prstGeom prst="rect">
+            <a:avLst/>
+          </a:prstGeom>
+          <a:noFill/>
+          <a:ln/>
+        </p:spPr>
+        <p:txBody>
+          <a:bodyPr wrap="square" lIns="0" tIns="0" rIns="0" bIns="0" rtlCol="0" anchor="t"/>
+          <a:lstStyle/>
+          <a:p>
+            <a:pPr algn="l" indent="0" marL="0">
+              <a:spcAft>
+                <a:spcPts val="600"/>
+              </a:spcAft>
+              <a:buNone/>
+            </a:pPr>
+            <a:r>
+              <a:rPr lang="en-US" sz="1350" dirty="0">
+                <a:solidFill>
+                  <a:srgbClr val="33444F"/>
+                </a:solidFill>
+                <a:latin typeface="Calibri" pitchFamily="34" charset="0"/>
+                <a:ea typeface="Calibri" pitchFamily="34" charset="-122"/>
+                <a:cs typeface="Calibri" pitchFamily="34" charset="-120"/>
+              </a:rPr>
+              <a:t>A. The highest concentration with growth</a:t>
+            </a:r>
+            <a:endParaRPr lang="en-US" sz="1350" dirty="0"/>
+          </a:p>
+          <a:p>
+            <a:pPr algn="l" indent="0" marL="0">
+              <a:spcAft>
+                <a:spcPts val="600"/>
+              </a:spcAft>
+              <a:buNone/>
+            </a:pPr>
+            <a:r>
+              <a:rPr lang="en-US" sz="1350" b="1" dirty="0">
+                <a:solidFill>
+                  <a:srgbClr val="1F5722"/>
+                </a:solidFill>
+                <a:latin typeface="Calibri" pitchFamily="34" charset="0"/>
+                <a:ea typeface="Calibri" pitchFamily="34" charset="-122"/>
+                <a:cs typeface="Calibri" pitchFamily="34" charset="-120"/>
+              </a:rPr>
+              <a:t>B. The lowest concentration that inhibits visible growth</a:t>
+            </a:r>
+            <a:endParaRPr lang="en-US" sz="1350" dirty="0"/>
+          </a:p>
+          <a:p>
+            <a:pPr algn="l" indent="0" marL="0">
+              <a:spcAft>
+                <a:spcPts val="600"/>
+              </a:spcAft>
+              <a:buNone/>
+            </a:pPr>
+            <a:r>
+              <a:rPr lang="en-US" sz="1350" dirty="0">
+                <a:solidFill>
+                  <a:srgbClr val="33444F"/>
+                </a:solidFill>
+                <a:latin typeface="Calibri" pitchFamily="34" charset="0"/>
+                <a:ea typeface="Calibri" pitchFamily="34" charset="-122"/>
+                <a:cs typeface="Calibri" pitchFamily="34" charset="-120"/>
+              </a:rPr>
+              <a:t>C. The zone diameter</a:t>
+            </a:r>
+            <a:endParaRPr lang="en-US" sz="1350" dirty="0"/>
+          </a:p>
+          <a:p>
+            <a:pPr algn="l" indent="0" marL="0">
+              <a:spcAft>
+                <a:spcPts val="600"/>
+              </a:spcAft>
+              <a:buNone/>
+            </a:pPr>
+            <a:r>
+              <a:rPr lang="en-US" sz="1350" dirty="0">
+                <a:solidFill>
+                  <a:srgbClr val="33444F"/>
+                </a:solidFill>
+                <a:latin typeface="Calibri" pitchFamily="34" charset="0"/>
+                <a:ea typeface="Calibri" pitchFamily="34" charset="-122"/>
+                <a:cs typeface="Calibri" pitchFamily="34" charset="-120"/>
+              </a:rPr>
+              <a:t>D. The serum drug level</a:t>
+            </a:r>
+            <a:endParaRPr lang="en-US" sz="1350" dirty="0"/>
+          </a:p>
+          <a:p>
+            <a:pPr algn="l" indent="0" marL="0">
+              <a:spcAft>
+                <a:spcPts val="600"/>
+              </a:spcAft>
+              <a:buNone/>
+            </a:pPr>
+            <a:r>
+              <a:rPr lang="en-US" sz="1350" dirty="0">
+                <a:solidFill>
+                  <a:srgbClr val="33444F"/>
+                </a:solidFill>
+                <a:latin typeface="Calibri" pitchFamily="34" charset="0"/>
+                <a:ea typeface="Calibri" pitchFamily="34" charset="-122"/>
+                <a:cs typeface="Calibri" pitchFamily="34" charset="-120"/>
+              </a:rPr>
+              <a:t>E. The breakpoint</a:t>
+            </a:r>
+            <a:endParaRPr lang="en-US" sz="1350" dirty="0"/>
+          </a:p>
+        </p:txBody>
+      </p:sp>
+      <p:sp>
+        <p:nvSpPr>
+          <p:cNvPr id="6" name="Shape 4"/>
+          <p:cNvSpPr/>
+          <p:nvPr/>
+        </p:nvSpPr>
+        <p:spPr>
+          <a:xfrm>
+            <a:off x="7201632" y="2395728"/>
+            <a:ext cx="4423136" cy="3246120"/>
+          </a:xfrm>
+          <a:prstGeom prst="roundRect">
+            <a:avLst>
+              <a:gd name="adj" fmla="val 2535"/>
+            </a:avLst>
+          </a:prstGeom>
+          <a:solidFill>
+            <a:srgbClr val="E8F2E9"/>
+          </a:solidFill>
+          <a:ln/>
+          <a:effectLst>
+            <a:outerShdw sx="100000" sy="100000" kx="0" ky="0" algn="bl" rotWithShape="0" blurRad="88900" dist="25400" dir="5400000">
+              <a:srgbClr val="22303C">
+                <a:alpha val="12000"/>
+              </a:srgbClr>
+            </a:outerShdw>
+          </a:effectLst>
+        </p:spPr>
+        <p:txBody>
+          <a:bodyPr/>
+          <a:p/>
+        </p:txBody>
+      </p:sp>
+      <p:sp>
+        <p:nvSpPr>
+          <p:cNvPr id="7" name="Text 5"/>
+          <p:cNvSpPr/>
+          <p:nvPr/>
+        </p:nvSpPr>
+        <p:spPr>
+          <a:xfrm>
+            <a:off x="7439376" y="2578608"/>
+            <a:ext cx="3965936" cy="457200"/>
+          </a:xfrm>
+          <a:prstGeom prst="rect">
+            <a:avLst/>
+          </a:prstGeom>
+          <a:noFill/>
+          <a:ln/>
+        </p:spPr>
+        <p:txBody>
+          <a:bodyPr wrap="square" lIns="0" tIns="0" rIns="0" bIns="0" rtlCol="0" anchor="ctr"/>
+          <a:lstStyle/>
+          <a:p>
+            <a:pPr indent="0" marL="0">
+              <a:buNone/>
+            </a:pPr>
+            <a:r>
+              <a:rPr lang="en-US" sz="1500" b="1" dirty="0">
+                <a:solidFill>
+                  <a:srgbClr val="2E7D32"/>
+                </a:solidFill>
+                <a:latin typeface="Calibri" pitchFamily="34" charset="0"/>
+                <a:ea typeface="Calibri" pitchFamily="34" charset="-122"/>
+                <a:cs typeface="Calibri" pitchFamily="34" charset="-120"/>
+              </a:rPr>
+              <a:t>ANSWER  </a:t>
+            </a:r>
+            <a:pPr indent="0" marL="0">
+              <a:buNone/>
+            </a:pPr>
+            <a:r>
+              <a:rPr lang="en-US" sz="1500" b="1" dirty="0">
+                <a:solidFill>
+                  <a:srgbClr val="1B2A38"/>
+                </a:solidFill>
+                <a:latin typeface="Calibri" pitchFamily="34" charset="0"/>
+                <a:ea typeface="Calibri" pitchFamily="34" charset="-122"/>
+                <a:cs typeface="Calibri" pitchFamily="34" charset="-120"/>
+              </a:rPr>
+              <a:t>B — Lowest concentration inhibiting visible growth</a:t>
+            </a:r>
+            <a:endParaRPr lang="en-US" sz="1500" dirty="0"/>
+          </a:p>
+        </p:txBody>
+      </p:sp>
+      <p:sp>
+        <p:nvSpPr>
+          <p:cNvPr id="8" name="Text 6"/>
+          <p:cNvSpPr/>
+          <p:nvPr/>
+        </p:nvSpPr>
+        <p:spPr>
+          <a:xfrm>
+            <a:off x="7439376" y="3127248"/>
+            <a:ext cx="3947648" cy="2377440"/>
+          </a:xfrm>
+          <a:prstGeom prst="rect">
+            <a:avLst/>
+          </a:prstGeom>
+          <a:noFill/>
+          <a:ln/>
+        </p:spPr>
+        <p:txBody>
+          <a:bodyPr wrap="square" lIns="0" tIns="0" rIns="0" bIns="0" rtlCol="0" anchor="t"/>
+          <a:lstStyle/>
+          <a:p>
+            <a:pPr algn="l" indent="0" marL="0">
+              <a:lnSpc>
+                <a:spcPct val="108000"/>
+              </a:lnSpc>
+              <a:buNone/>
+            </a:pPr>
+            <a:r>
+              <a:rPr lang="en-US" sz="1250" dirty="0">
+                <a:solidFill>
+                  <a:srgbClr val="33444F"/>
+                </a:solidFill>
+                <a:latin typeface="Calibri" pitchFamily="34" charset="0"/>
+                <a:ea typeface="Calibri" pitchFamily="34" charset="-122"/>
+                <a:cs typeface="Calibri" pitchFamily="34" charset="-120"/>
+              </a:rPr>
+              <a:t>The MIC is the minimum inhibitory concentration; breakpoints translate it into S/I/R.</a:t>
+            </a:r>
+            <a:endParaRPr lang="en-US" sz="1250" dirty="0"/>
+          </a:p>
+        </p:txBody>
+      </p:sp>
+      <p:sp>
+        <p:nvSpPr>
+          <p:cNvPr id="9" name="Text 7"/>
+          <p:cNvSpPr/>
+          <p:nvPr/>
+        </p:nvSpPr>
+        <p:spPr>
+          <a:xfrm>
+            <a:off x="566928" y="6473952"/>
+            <a:ext cx="7772400" cy="274320"/>
+          </a:xfrm>
+          <a:prstGeom prst="rect">
+            <a:avLst/>
+          </a:prstGeom>
+          <a:noFill/>
+          <a:ln/>
+        </p:spPr>
+        <p:txBody>
+          <a:bodyPr wrap="square" lIns="0" tIns="0" rIns="0" bIns="0" rtlCol="0" anchor="ctr"/>
+          <a:lstStyle/>
+          <a:p>
+            <a:pPr algn="l" indent="0" marL="0">
+              <a:buNone/>
+            </a:pPr>
+            <a:r>
+              <a:rPr lang="en-US" sz="850" dirty="0">
+                <a:solidFill>
+                  <a:srgbClr val="9AA8B4"/>
+                </a:solidFill>
+                <a:latin typeface="Calibri" pitchFamily="34" charset="0"/>
+                <a:ea typeface="Calibri" pitchFamily="34" charset="-122"/>
+                <a:cs typeface="Calibri" pitchFamily="34" charset="-120"/>
+              </a:rPr>
+              <a:t>Makassed General Hospital  ·  Department of Laboratory Medicine</a:t>
+            </a:r>
+            <a:endParaRPr lang="en-US" sz="850" dirty="0"/>
+          </a:p>
+        </p:txBody>
+      </p:sp>
+      <p:sp>
+        <p:nvSpPr>
+          <p:cNvPr id="10" name="Text 8"/>
+          <p:cNvSpPr/>
+          <p:nvPr/>
+        </p:nvSpPr>
+        <p:spPr>
+          <a:xfrm>
+            <a:off x="9814255" y="6473952"/>
+            <a:ext cx="1828800" cy="274320"/>
+          </a:xfrm>
+          <a:prstGeom prst="rect">
+            <a:avLst/>
+          </a:prstGeom>
+          <a:noFill/>
+          <a:ln/>
+        </p:spPr>
+        <p:txBody>
+          <a:bodyPr wrap="square" lIns="0" tIns="0" rIns="0" bIns="0" rtlCol="0" anchor="ctr"/>
+          <a:lstStyle/>
+          <a:p>
+            <a:pPr algn="r" indent="0" marL="0">
+              <a:buNone/>
+            </a:pPr>
+            <a:r>
+              <a:rPr lang="en-US" sz="850" dirty="0">
+                <a:solidFill>
+                  <a:srgbClr val="9AA8B4"/>
+                </a:solidFill>
+                <a:latin typeface="Calibri" pitchFamily="34" charset="0"/>
+                <a:ea typeface="Calibri" pitchFamily="34" charset="-122"/>
+                <a:cs typeface="Calibri" pitchFamily="34" charset="-120"/>
+              </a:rPr>
+              <a:t>CP Lecture Series</a:t>
+            </a:r>
+            <a:pPr algn="r" indent="0" marL="0">
+              <a:buNone/>
+            </a:pPr>
+            <a:r>
+              <a:rPr lang="en-US" sz="850" dirty="0">
+                <a:solidFill>
+                  <a:srgbClr val="DCE4EC"/>
+                </a:solidFill>
+                <a:latin typeface="Calibri" pitchFamily="34" charset="0"/>
+                <a:ea typeface="Calibri" pitchFamily="34" charset="-122"/>
+                <a:cs typeface="Calibri" pitchFamily="34" charset="-120"/>
+              </a:rPr>
+              <a:t>   ·   </a:t>
+            </a:r>
+            <a:pPr algn="r" indent="0" marL="0">
+              <a:buNone/>
+            </a:pPr>
+            <a:r>
+              <a:rPr lang="en-US" sz="850" b="1" dirty="0">
+                <a:solidFill>
+                  <a:srgbClr val="2E7D32"/>
+                </a:solidFill>
+                <a:latin typeface="Calibri" pitchFamily="34" charset="0"/>
+                <a:ea typeface="Calibri" pitchFamily="34" charset="-122"/>
+                <a:cs typeface="Calibri" pitchFamily="34" charset="-120"/>
+              </a:rPr>
+              <a:t>17</a:t>
+            </a:r>
+            <a:endParaRPr lang="en-US" sz="850" dirty="0"/>
+          </a:p>
+        </p:txBody>
+      </p:sp>
+    </p:spTree>
+  </p:cSld>
+  <p:clrMapOvr>
+    <a:masterClrMapping/>
+  </p:clrMapOvr>
+</p:sld>
+</file>
+
 <file path=ppt/slides/slide3.xml><?xml version="1.0" encoding="utf-8"?>
 <p:sld xmlns:a="http://schemas.openxmlformats.org/drawingml/2006/main" xmlns:r="http://schemas.openxmlformats.org/officeDocument/2006/relationships" xmlns:p="http://schemas.openxmlformats.org/presentationml/2006/main">
   <p:cSld name="Slide 3">
@@ -12509,6 +14121,10 @@
             </a:outerShdw>
           </a:effectLst>
         </p:spPr>
+        <p:txBody>
+          <a:bodyPr/>
+          <a:p/>
+        </p:txBody>
       </p:sp>
       <p:sp>
         <p:nvSpPr>
@@ -12536,6 +14152,10 @@
             </a:outerShdw>
           </a:effectLst>
         </p:spPr>
+        <p:txBody>
+          <a:bodyPr/>
+          <a:p/>
+        </p:txBody>
       </p:sp>
       <p:sp>
         <p:nvSpPr>
@@ -12643,6 +14263,10 @@
             </a:outerShdw>
           </a:effectLst>
         </p:spPr>
+        <p:txBody>
+          <a:bodyPr/>
+          <a:p/>
+        </p:txBody>
       </p:sp>
       <p:sp>
         <p:nvSpPr>
@@ -12670,6 +14294,10 @@
             </a:outerShdw>
           </a:effectLst>
         </p:spPr>
+        <p:txBody>
+          <a:bodyPr/>
+          <a:p/>
+        </p:txBody>
       </p:sp>
       <p:sp>
         <p:nvSpPr>
@@ -12777,6 +14405,10 @@
             </a:outerShdw>
           </a:effectLst>
         </p:spPr>
+        <p:txBody>
+          <a:bodyPr/>
+          <a:p/>
+        </p:txBody>
       </p:sp>
       <p:sp>
         <p:nvSpPr>
@@ -12804,6 +14436,10 @@
             </a:outerShdw>
           </a:effectLst>
         </p:spPr>
+        <p:txBody>
+          <a:bodyPr/>
+          <a:p/>
+        </p:txBody>
       </p:sp>
       <p:sp>
         <p:nvSpPr>
@@ -12911,6 +14547,10 @@
             </a:outerShdw>
           </a:effectLst>
         </p:spPr>
+        <p:txBody>
+          <a:bodyPr/>
+          <a:p/>
+        </p:txBody>
       </p:sp>
       <p:sp>
         <p:nvSpPr>
@@ -12938,6 +14578,10 @@
             </a:outerShdw>
           </a:effectLst>
         </p:spPr>
+        <p:txBody>
+          <a:bodyPr/>
+          <a:p/>
+        </p:txBody>
       </p:sp>
       <p:sp>
         <p:nvSpPr>
@@ -13045,6 +14689,10 @@
             </a:outerShdw>
           </a:effectLst>
         </p:spPr>
+        <p:txBody>
+          <a:bodyPr/>
+          <a:p/>
+        </p:txBody>
       </p:sp>
       <p:sp>
         <p:nvSpPr>
@@ -13072,6 +14720,10 @@
             </a:outerShdw>
           </a:effectLst>
         </p:spPr>
+        <p:txBody>
+          <a:bodyPr/>
+          <a:p/>
+        </p:txBody>
       </p:sp>
       <p:sp>
         <p:nvSpPr>
@@ -13179,6 +14831,10 @@
             </a:outerShdw>
           </a:effectLst>
         </p:spPr>
+        <p:txBody>
+          <a:bodyPr/>
+          <a:p/>
+        </p:txBody>
       </p:sp>
       <p:sp>
         <p:nvSpPr>
@@ -13206,6 +14862,10 @@
             </a:outerShdw>
           </a:effectLst>
         </p:spPr>
+        <p:txBody>
+          <a:bodyPr/>
+          <a:p/>
+        </p:txBody>
       </p:sp>
       <p:sp>
         <p:nvSpPr>
@@ -13529,6 +15189,10 @@
             </a:outerShdw>
           </a:effectLst>
         </p:spPr>
+        <p:txBody>
+          <a:bodyPr/>
+          <a:p/>
+        </p:txBody>
       </p:sp>
       <p:sp>
         <p:nvSpPr>
@@ -13556,6 +15220,10 @@
             </a:outerShdw>
           </a:effectLst>
         </p:spPr>
+        <p:txBody>
+          <a:bodyPr/>
+          <a:p/>
+        </p:txBody>
       </p:sp>
       <p:sp>
         <p:nvSpPr>
@@ -13670,6 +15338,10 @@
           </a:solidFill>
           <a:ln/>
         </p:spPr>
+        <p:txBody>
+          <a:bodyPr/>
+          <a:p/>
+        </p:txBody>
       </p:sp>
       <p:sp>
         <p:nvSpPr>
@@ -13697,6 +15369,10 @@
             </a:outerShdw>
           </a:effectLst>
         </p:spPr>
+        <p:txBody>
+          <a:bodyPr/>
+          <a:p/>
+        </p:txBody>
       </p:sp>
       <p:sp>
         <p:nvSpPr>
@@ -13818,6 +15494,10 @@
             </a:outerShdw>
           </a:effectLst>
         </p:spPr>
+        <p:txBody>
+          <a:bodyPr/>
+          <a:p/>
+        </p:txBody>
       </p:sp>
       <p:sp>
         <p:nvSpPr>
@@ -13845,6 +15525,10 @@
             </a:outerShdw>
           </a:effectLst>
         </p:spPr>
+        <p:txBody>
+          <a:bodyPr/>
+          <a:p/>
+        </p:txBody>
       </p:sp>
       <p:sp>
         <p:nvSpPr>
@@ -13959,6 +15643,10 @@
           </a:solidFill>
           <a:ln/>
         </p:spPr>
+        <p:txBody>
+          <a:bodyPr/>
+          <a:p/>
+        </p:txBody>
       </p:sp>
       <p:sp>
         <p:nvSpPr>
@@ -13986,6 +15674,10 @@
             </a:outerShdw>
           </a:effectLst>
         </p:spPr>
+        <p:txBody>
+          <a:bodyPr/>
+          <a:p/>
+        </p:txBody>
       </p:sp>
       <p:sp>
         <p:nvSpPr>
@@ -14107,6 +15799,10 @@
             </a:outerShdw>
           </a:effectLst>
         </p:spPr>
+        <p:txBody>
+          <a:bodyPr/>
+          <a:p/>
+        </p:txBody>
       </p:sp>
       <p:sp>
         <p:nvSpPr>
@@ -14134,6 +15830,10 @@
             </a:outerShdw>
           </a:effectLst>
         </p:spPr>
+        <p:txBody>
+          <a:bodyPr/>
+          <a:p/>
+        </p:txBody>
       </p:sp>
       <p:sp>
         <p:nvSpPr>
@@ -14372,6 +16072,10 @@
           </a:solidFill>
           <a:ln/>
         </p:spPr>
+        <p:txBody>
+          <a:bodyPr/>
+          <a:p/>
+        </p:txBody>
       </p:sp>
       <p:sp>
         <p:nvSpPr>
@@ -14394,6 +16098,10 @@
           </a:solidFill>
           <a:ln/>
         </p:spPr>
+        <p:txBody>
+          <a:bodyPr/>
+          <a:p/>
+        </p:txBody>
       </p:sp>
       <p:sp>
         <p:nvSpPr>
@@ -14655,6 +16363,10 @@
             </a:outerShdw>
           </a:effectLst>
         </p:spPr>
+        <p:txBody>
+          <a:bodyPr/>
+          <a:p/>
+        </p:txBody>
       </p:sp>
       <p:pic>
         <p:nvPicPr>
@@ -14963,6 +16675,10 @@
             </a:outerShdw>
           </a:effectLst>
         </p:spPr>
+        <p:txBody>
+          <a:bodyPr/>
+          <a:p/>
+        </p:txBody>
       </p:sp>
       <p:sp>
         <p:nvSpPr>
@@ -15137,6 +16853,10 @@
             </a:outerShdw>
           </a:effectLst>
         </p:spPr>
+        <p:txBody>
+          <a:bodyPr/>
+          <a:p/>
+        </p:txBody>
       </p:sp>
       <p:sp>
         <p:nvSpPr>
@@ -15442,6 +17162,10 @@
           </a:solidFill>
           <a:ln/>
         </p:spPr>
+        <p:txBody>
+          <a:bodyPr/>
+          <a:p/>
+        </p:txBody>
       </p:sp>
       <p:sp>
         <p:nvSpPr>
@@ -15464,6 +17188,10 @@
           </a:solidFill>
           <a:ln/>
         </p:spPr>
+        <p:txBody>
+          <a:bodyPr/>
+          <a:p/>
+        </p:txBody>
       </p:sp>
       <p:sp>
         <p:nvSpPr>
@@ -15720,6 +17448,10 @@
             </a:outerShdw>
           </a:effectLst>
         </p:spPr>
+        <p:txBody>
+          <a:bodyPr/>
+          <a:p/>
+        </p:txBody>
       </p:sp>
       <p:sp>
         <p:nvSpPr>
@@ -15894,6 +17626,10 @@
             </a:outerShdw>
           </a:effectLst>
         </p:spPr>
+        <p:txBody>
+          <a:bodyPr/>
+          <a:p/>
+        </p:txBody>
       </p:sp>
       <p:sp>
         <p:nvSpPr>
